--- a/Metodologia_Obliant.pptx
+++ b/Metodologia_Obliant.pptx
@@ -3129,7 +3129,7 @@
                 <a:ea typeface="Inter" pitchFamily="34" charset="-122"/>
                 <a:cs typeface="Inter" pitchFamily="34" charset="-120"/>
               </a:rPr>
-              <a:t>Ativo interno · times comercial e de consultoria</a:t>
+              <a:t>Uso comercial e de consultoria · material exclusivo Obliant</a:t>
             </a:r>
             <a:endParaRPr lang="en-US" sz="1100" dirty="0"/>
           </a:p>
@@ -3607,7 +3607,7 @@
         <p:spPr>
           <a:xfrm>
             <a:off x="548640" y="6473952"/>
-            <a:ext cx="7315200" cy="274320"/>
+            <a:ext cx="8686800" cy="274320"/>
           </a:xfrm>
           <a:prstGeom prst="rect">
             <a:avLst/>
@@ -3631,7 +3631,7 @@
                 <a:ea typeface="Inter" pitchFamily="34" charset="-122"/>
                 <a:cs typeface="Inter" pitchFamily="34" charset="-120"/>
               </a:rPr>
-              <a:t>Metodologia Governança, Projetos e Mudança  ·  material interno</a:t>
+              <a:t>Metodologia Governança, Projetos e Mudança  ·  material interno e exclusivo Obliant</a:t>
             </a:r>
             <a:endParaRPr lang="en-US" sz="800" dirty="0"/>
           </a:p>
@@ -5696,7 +5696,7 @@
         <p:spPr>
           <a:xfrm>
             <a:off x="548640" y="6473952"/>
-            <a:ext cx="7315200" cy="274320"/>
+            <a:ext cx="8686800" cy="274320"/>
           </a:xfrm>
           <a:prstGeom prst="rect">
             <a:avLst/>
@@ -5720,7 +5720,7 @@
                 <a:ea typeface="Inter" pitchFamily="34" charset="-122"/>
                 <a:cs typeface="Inter" pitchFamily="34" charset="-120"/>
               </a:rPr>
-              <a:t>Metodologia Governança, Projetos e Mudança  ·  material interno</a:t>
+              <a:t>Metodologia Governança, Projetos e Mudança  ·  material interno e exclusivo Obliant</a:t>
             </a:r>
             <a:endParaRPr lang="en-US" sz="800" dirty="0"/>
           </a:p>
@@ -8151,7 +8151,7 @@
         <p:spPr>
           <a:xfrm>
             <a:off x="548640" y="6473952"/>
-            <a:ext cx="7315200" cy="274320"/>
+            <a:ext cx="8686800" cy="274320"/>
           </a:xfrm>
           <a:prstGeom prst="rect">
             <a:avLst/>
@@ -8175,7 +8175,7 @@
                 <a:ea typeface="Inter" pitchFamily="34" charset="-122"/>
                 <a:cs typeface="Inter" pitchFamily="34" charset="-120"/>
               </a:rPr>
-              <a:t>Metodologia Governança, Projetos e Mudança  ·  material interno</a:t>
+              <a:t>Metodologia Governança, Projetos e Mudança  ·  material interno e exclusivo Obliant</a:t>
             </a:r>
             <a:endParaRPr lang="en-US" sz="800" dirty="0"/>
           </a:p>
@@ -9446,7 +9446,7 @@
         <p:spPr>
           <a:xfrm>
             <a:off x="548640" y="6473952"/>
-            <a:ext cx="7315200" cy="274320"/>
+            <a:ext cx="8686800" cy="274320"/>
           </a:xfrm>
           <a:prstGeom prst="rect">
             <a:avLst/>
@@ -9470,7 +9470,7 @@
                 <a:ea typeface="Inter" pitchFamily="34" charset="-122"/>
                 <a:cs typeface="Inter" pitchFamily="34" charset="-120"/>
               </a:rPr>
-              <a:t>Metodologia Governança, Projetos e Mudança  ·  material interno</a:t>
+              <a:t>Metodologia Governança, Projetos e Mudança  ·  material interno e exclusivo Obliant</a:t>
             </a:r>
             <a:endParaRPr lang="en-US" sz="800" dirty="0"/>
           </a:p>
@@ -10809,7 +10809,7 @@
         <p:spPr>
           <a:xfrm>
             <a:off x="548640" y="6473952"/>
-            <a:ext cx="7315200" cy="274320"/>
+            <a:ext cx="8686800" cy="274320"/>
           </a:xfrm>
           <a:prstGeom prst="rect">
             <a:avLst/>
@@ -10833,7 +10833,7 @@
                 <a:ea typeface="Inter" pitchFamily="34" charset="-122"/>
                 <a:cs typeface="Inter" pitchFamily="34" charset="-120"/>
               </a:rPr>
-              <a:t>Metodologia Governança, Projetos e Mudança  ·  material interno</a:t>
+              <a:t>Metodologia Governança, Projetos e Mudança  ·  material interno e exclusivo Obliant</a:t>
             </a:r>
             <a:endParaRPr lang="en-US" sz="800" dirty="0"/>
           </a:p>
@@ -14643,7 +14643,7 @@
         <p:spPr>
           <a:xfrm>
             <a:off x="548640" y="6473952"/>
-            <a:ext cx="7315200" cy="274320"/>
+            <a:ext cx="8686800" cy="274320"/>
           </a:xfrm>
           <a:prstGeom prst="rect">
             <a:avLst/>
@@ -14667,7 +14667,7 @@
                 <a:ea typeface="Inter" pitchFamily="34" charset="-122"/>
                 <a:cs typeface="Inter" pitchFamily="34" charset="-120"/>
               </a:rPr>
-              <a:t>Metodologia Governança, Projetos e Mudança  ·  material interno</a:t>
+              <a:t>Metodologia Governança, Projetos e Mudança  ·  material interno e exclusivo Obliant</a:t>
             </a:r>
             <a:endParaRPr lang="en-US" sz="800" dirty="0"/>
           </a:p>
@@ -16560,7 +16560,7 @@
                 <a:ea typeface="Inter" pitchFamily="34" charset="-122"/>
                 <a:cs typeface="Inter" pitchFamily="34" charset="-120"/>
               </a:rPr>
-              <a:t>PM&amp;GO · VENN</a:t>
+              <a:t>PM&amp;GO · PMO × GMO</a:t>
             </a:r>
             <a:endParaRPr lang="en-US" sz="1000" dirty="0"/>
           </a:p>
@@ -16638,7 +16638,7 @@
                 <a:ea typeface="Inter" pitchFamily="34" charset="-122"/>
                 <a:cs typeface="Inter" pitchFamily="34" charset="-120"/>
               </a:rPr>
-              <a:t>Cada entregável e atividade do PM&amp;GO é etiquetado (PMO / GMO / compartilhado) para o Venn ser operacional, não só conceitual.</a:t>
+              <a:t>Cada entregável e atividade do PM&amp;GO é etiquetado (PMO / GMO / compartilhado) para a divisão PMO × GMO ser operacional, não só conceitual.</a:t>
             </a:r>
             <a:endParaRPr lang="en-US" sz="1100" dirty="0"/>
           </a:p>
@@ -16653,7 +16653,7 @@
         <p:spPr>
           <a:xfrm>
             <a:off x="548640" y="6473952"/>
-            <a:ext cx="7315200" cy="274320"/>
+            <a:ext cx="8686800" cy="274320"/>
           </a:xfrm>
           <a:prstGeom prst="rect">
             <a:avLst/>
@@ -16677,7 +16677,7 @@
                 <a:ea typeface="Inter" pitchFamily="34" charset="-122"/>
                 <a:cs typeface="Inter" pitchFamily="34" charset="-120"/>
               </a:rPr>
-              <a:t>Metodologia Governança, Projetos e Mudança  ·  material interno</a:t>
+              <a:t>Metodologia Governança, Projetos e Mudança  ·  material interno e exclusivo Obliant</a:t>
             </a:r>
             <a:endParaRPr lang="en-US" sz="800" dirty="0"/>
           </a:p>
@@ -17673,7 +17673,7 @@
         <p:spPr>
           <a:xfrm>
             <a:off x="548640" y="6473952"/>
-            <a:ext cx="7315200" cy="274320"/>
+            <a:ext cx="8686800" cy="274320"/>
           </a:xfrm>
           <a:prstGeom prst="rect">
             <a:avLst/>
@@ -17697,7 +17697,7 @@
                 <a:ea typeface="Inter" pitchFamily="34" charset="-122"/>
                 <a:cs typeface="Inter" pitchFamily="34" charset="-120"/>
               </a:rPr>
-              <a:t>Metodologia Governança, Projetos e Mudança  ·  material interno</a:t>
+              <a:t>Metodologia Governança, Projetos e Mudança  ·  material interno e exclusivo Obliant</a:t>
             </a:r>
             <a:endParaRPr lang="en-US" sz="800" dirty="0"/>
           </a:p>
@@ -20128,7 +20128,7 @@
         <p:spPr>
           <a:xfrm>
             <a:off x="548640" y="6473952"/>
-            <a:ext cx="7315200" cy="274320"/>
+            <a:ext cx="8686800" cy="274320"/>
           </a:xfrm>
           <a:prstGeom prst="rect">
             <a:avLst/>
@@ -20152,7 +20152,7 @@
                 <a:ea typeface="Inter" pitchFamily="34" charset="-122"/>
                 <a:cs typeface="Inter" pitchFamily="34" charset="-120"/>
               </a:rPr>
-              <a:t>Metodologia Governança, Projetos e Mudança  ·  material interno</a:t>
+              <a:t>Metodologia Governança, Projetos e Mudança  ·  material interno e exclusivo Obliant</a:t>
             </a:r>
             <a:endParaRPr lang="en-US" sz="800" dirty="0"/>
           </a:p>
@@ -21167,7 +21167,7 @@
         <p:spPr>
           <a:xfrm>
             <a:off x="548640" y="6473952"/>
-            <a:ext cx="7315200" cy="274320"/>
+            <a:ext cx="8686800" cy="274320"/>
           </a:xfrm>
           <a:prstGeom prst="rect">
             <a:avLst/>
@@ -21191,7 +21191,7 @@
                 <a:ea typeface="Inter" pitchFamily="34" charset="-122"/>
                 <a:cs typeface="Inter" pitchFamily="34" charset="-120"/>
               </a:rPr>
-              <a:t>Metodologia Governança, Projetos e Mudança  ·  material interno</a:t>
+              <a:t>Metodologia Governança, Projetos e Mudança  ·  material interno e exclusivo Obliant</a:t>
             </a:r>
             <a:endParaRPr lang="en-US" sz="800" dirty="0"/>
           </a:p>
@@ -22408,7 +22408,7 @@
                 <a:ea typeface="Fraunces" pitchFamily="34" charset="-122"/>
                 <a:cs typeface="Fraunces" pitchFamily="34" charset="-120"/>
               </a:rPr>
-              <a:t>Assessment de fit — dois eixos, produto e modo certos</a:t>
+              <a:t>Assessment de fit — três eixos, oferta e modo certos</a:t>
             </a:r>
             <a:endParaRPr lang="en-US" sz="2600" dirty="0"/>
           </a:p>
@@ -22447,7 +22447,7 @@
                 <a:ea typeface="Inter" pitchFamily="34" charset="-122"/>
                 <a:cs typeface="Inter" pitchFamily="34" charset="-120"/>
               </a:rPr>
-              <a:t>Para o PM&amp;GO o assessment mede adequação (fit), não só maturidade: 6 perguntas em dois eixos — A (necessidade de entrega) e B (necessidade de adoção). O resultado recomenda o produto certo e o modo de atuação.</a:t>
+              <a:t>Para o PM&amp;GO o assessment mede adequação (fit), não maturidade: 8 perguntas em três eixos — A (necessidade de entrega), B (necessidade de adoção) e C (interdependência e criticidade). O resultado recomenda a oferta certa — só EPP, só GMO, EPP + GMO apartados, PM&amp;GO integrado ou suporte leve — e o modo de atuação.</a:t>
             </a:r>
             <a:endParaRPr lang="en-US" sz="1100" dirty="0"/>
           </a:p>
@@ -22462,7 +22462,7 @@
         <p:spPr>
           <a:xfrm>
             <a:off x="548640" y="6473952"/>
-            <a:ext cx="7315200" cy="274320"/>
+            <a:ext cx="8686800" cy="274320"/>
           </a:xfrm>
           <a:prstGeom prst="rect">
             <a:avLst/>
@@ -22486,7 +22486,7 @@
                 <a:ea typeface="Inter" pitchFamily="34" charset="-122"/>
                 <a:cs typeface="Inter" pitchFamily="34" charset="-120"/>
               </a:rPr>
-              <a:t>Metodologia Governança, Projetos e Mudança  ·  material interno</a:t>
+              <a:t>Metodologia Governança, Projetos e Mudança  ·  material interno e exclusivo Obliant</a:t>
             </a:r>
             <a:endParaRPr lang="en-US" sz="800" dirty="0"/>
           </a:p>
@@ -22539,12 +22539,12 @@
         </p:nvSpPr>
         <p:spPr>
           <a:xfrm>
-            <a:off x="548640" y="1920240"/>
-            <a:ext cx="5408676" cy="2286000"/>
+            <a:off x="548640" y="1856232"/>
+            <a:ext cx="3544824" cy="1371600"/>
           </a:xfrm>
           <a:prstGeom prst="roundRect">
             <a:avLst>
-              <a:gd name="adj" fmla="val 2400"/>
+              <a:gd name="adj" fmla="val 4000"/>
             </a:avLst>
           </a:prstGeom>
           <a:solidFill>
@@ -22566,24 +22566,24 @@
         </p:nvSpPr>
         <p:spPr>
           <a:xfrm>
-            <a:off x="713232" y="2039112"/>
-            <a:ext cx="5079492" cy="256032"/>
-          </a:xfrm>
-          <a:prstGeom prst="rect">
-            <a:avLst/>
-          </a:prstGeom>
-          <a:noFill/>
-          <a:ln/>
-        </p:spPr>
-        <p:txBody>
-          <a:bodyPr wrap="square" rtlCol="0" anchor="ctr"/>
-          <a:lstStyle/>
-          <a:p>
-            <a:pPr indent="0" marL="0">
-              <a:buNone/>
-            </a:pPr>
-            <a:r>
-              <a:rPr lang="en-US" sz="1000" b="1" spc="200" kern="0" dirty="0">
+            <a:off x="694944" y="1965960"/>
+            <a:ext cx="3252216" cy="237744"/>
+          </a:xfrm>
+          <a:prstGeom prst="rect">
+            <a:avLst/>
+          </a:prstGeom>
+          <a:noFill/>
+          <a:ln/>
+        </p:spPr>
+        <p:txBody>
+          <a:bodyPr wrap="square" rtlCol="0" anchor="ctr"/>
+          <a:lstStyle/>
+          <a:p>
+            <a:pPr indent="0" marL="0">
+              <a:buNone/>
+            </a:pPr>
+            <a:r>
+              <a:rPr lang="en-US" sz="950" b="1" spc="100" kern="0" dirty="0">
                 <a:solidFill>
                   <a:srgbClr val="998D67"/>
                 </a:solidFill>
@@ -22591,9 +22591,9 @@
                 <a:ea typeface="Inter" pitchFamily="34" charset="-122"/>
                 <a:cs typeface="Inter" pitchFamily="34" charset="-120"/>
               </a:rPr>
-              <a:t>EIXO A · NECESSIDADE DE ENTREGA</a:t>
-            </a:r>
-            <a:endParaRPr lang="en-US" sz="1000" dirty="0"/>
+              <a:t>EIXO A · ENTREGA</a:t>
+            </a:r>
+            <a:endParaRPr lang="en-US" sz="950" dirty="0"/>
           </a:p>
         </p:txBody>
       </p:sp>
@@ -22605,8 +22605,8 @@
         </p:nvSpPr>
         <p:spPr>
           <a:xfrm>
-            <a:off x="713232" y="2350008"/>
-            <a:ext cx="5079492" cy="1737360"/>
+            <a:off x="694944" y="2240280"/>
+            <a:ext cx="3252216" cy="914400"/>
           </a:xfrm>
           <a:prstGeom prst="rect">
             <a:avLst/>
@@ -22634,7 +22634,7 @@
                 <a:ea typeface="Inter" pitchFamily="34" charset="-122"/>
                 <a:cs typeface="Inter" pitchFamily="34" charset="-120"/>
               </a:rPr>
-              <a:t>Complexidade de entrega — O projeto tem alta complexidade de escopo, prazo ou orçamento (multiáreas, fornecedores, dependências)?</a:t>
+              <a:t>Complexidade de entrega</a:t>
             </a:r>
             <a:endParaRPr lang="en-US" sz="900" dirty="0"/>
           </a:p>
@@ -22655,7 +22655,7 @@
                 <a:ea typeface="Inter" pitchFamily="34" charset="-122"/>
                 <a:cs typeface="Inter" pitchFamily="34" charset="-120"/>
               </a:rPr>
-              <a:t>Histórico de entrega — A organização tem histórico de atrasos, estouros de custo ou projetos abandonados?</a:t>
+              <a:t>Histórico de entrega</a:t>
             </a:r>
             <a:endParaRPr lang="en-US" sz="900" dirty="0"/>
           </a:p>
@@ -22676,7 +22676,7 @@
                 <a:ea typeface="Inter" pitchFamily="34" charset="-122"/>
                 <a:cs typeface="Inter" pitchFamily="34" charset="-120"/>
               </a:rPr>
-              <a:t>Capacidade de gestão — Falta hoje método, papéis ou governança para conduzir esse projeto internamente?</a:t>
+              <a:t>Capacidade de gestão</a:t>
             </a:r>
             <a:endParaRPr lang="en-US" sz="900" dirty="0"/>
           </a:p>
@@ -22690,12 +22690,12 @@
         </p:nvSpPr>
         <p:spPr>
           <a:xfrm>
-            <a:off x="6231636" y="1920240"/>
-            <a:ext cx="5408676" cy="2286000"/>
+            <a:off x="4322064" y="1856232"/>
+            <a:ext cx="3544824" cy="1371600"/>
           </a:xfrm>
           <a:prstGeom prst="roundRect">
             <a:avLst>
-              <a:gd name="adj" fmla="val 2400"/>
+              <a:gd name="adj" fmla="val 4000"/>
             </a:avLst>
           </a:prstGeom>
           <a:solidFill>
@@ -22717,24 +22717,24 @@
         </p:nvSpPr>
         <p:spPr>
           <a:xfrm>
-            <a:off x="6396228" y="2039112"/>
-            <a:ext cx="5079492" cy="256032"/>
-          </a:xfrm>
-          <a:prstGeom prst="rect">
-            <a:avLst/>
-          </a:prstGeom>
-          <a:noFill/>
-          <a:ln/>
-        </p:spPr>
-        <p:txBody>
-          <a:bodyPr wrap="square" rtlCol="0" anchor="ctr"/>
-          <a:lstStyle/>
-          <a:p>
-            <a:pPr indent="0" marL="0">
-              <a:buNone/>
-            </a:pPr>
-            <a:r>
-              <a:rPr lang="en-US" sz="1000" b="1" spc="200" kern="0" dirty="0">
+            <a:off x="4468368" y="1965960"/>
+            <a:ext cx="3252216" cy="237744"/>
+          </a:xfrm>
+          <a:prstGeom prst="rect">
+            <a:avLst/>
+          </a:prstGeom>
+          <a:noFill/>
+          <a:ln/>
+        </p:spPr>
+        <p:txBody>
+          <a:bodyPr wrap="square" rtlCol="0" anchor="ctr"/>
+          <a:lstStyle/>
+          <a:p>
+            <a:pPr indent="0" marL="0">
+              <a:buNone/>
+            </a:pPr>
+            <a:r>
+              <a:rPr lang="en-US" sz="950" b="1" spc="100" kern="0" dirty="0">
                 <a:solidFill>
                   <a:srgbClr val="998D67"/>
                 </a:solidFill>
@@ -22742,9 +22742,9 @@
                 <a:ea typeface="Inter" pitchFamily="34" charset="-122"/>
                 <a:cs typeface="Inter" pitchFamily="34" charset="-120"/>
               </a:rPr>
-              <a:t>EIXO B · NECESSIDADE DE ADOÇÃO</a:t>
-            </a:r>
-            <a:endParaRPr lang="en-US" sz="1000" dirty="0"/>
+              <a:t>EIXO B · ADOÇÃO</a:t>
+            </a:r>
+            <a:endParaRPr lang="en-US" sz="950" dirty="0"/>
           </a:p>
         </p:txBody>
       </p:sp>
@@ -22756,8 +22756,8 @@
         </p:nvSpPr>
         <p:spPr>
           <a:xfrm>
-            <a:off x="6396228" y="2350008"/>
-            <a:ext cx="5079492" cy="1737360"/>
+            <a:off x="4468368" y="2240280"/>
+            <a:ext cx="3252216" cy="914400"/>
           </a:xfrm>
           <a:prstGeom prst="rect">
             <a:avLst/>
@@ -22785,7 +22785,7 @@
                 <a:ea typeface="Inter" pitchFamily="34" charset="-122"/>
                 <a:cs typeface="Inter" pitchFamily="34" charset="-120"/>
               </a:rPr>
-              <a:t>Impacto nas pessoas — A mudança altera de forma significativa rotinas, papéis ou a forma de trabalhar das pessoas?</a:t>
+              <a:t>Impacto nas pessoas</a:t>
             </a:r>
             <a:endParaRPr lang="en-US" sz="900" dirty="0"/>
           </a:p>
@@ -22806,7 +22806,7 @@
                 <a:ea typeface="Inter" pitchFamily="34" charset="-122"/>
                 <a:cs typeface="Inter" pitchFamily="34" charset="-120"/>
               </a:rPr>
-              <a:t>Risco de resistência — Há risco relevante de resistência, baixa adesão ou regressão ao modo antigo?</a:t>
+              <a:t>Risco de resistência</a:t>
             </a:r>
             <a:endParaRPr lang="en-US" sz="900" dirty="0"/>
           </a:p>
@@ -22827,7 +22827,7 @@
                 <a:ea typeface="Inter" pitchFamily="34" charset="-122"/>
                 <a:cs typeface="Inter" pitchFamily="34" charset="-120"/>
               </a:rPr>
-              <a:t>Dependência de adoção — O retorno do projeto depende diretamente de as pessoas usarem/adotarem o novo modelo?</a:t>
+              <a:t>Dependência de adoção</a:t>
             </a:r>
             <a:endParaRPr lang="en-US" sz="900" dirty="0"/>
           </a:p>
@@ -22835,57 +22835,226 @@
       </p:sp>
       <p:sp>
         <p:nvSpPr>
-          <p:cNvPr id="14" name="Text 12"/>
-          <p:cNvSpPr/>
-          <p:nvPr/>
-        </p:nvSpPr>
-        <p:spPr>
-          <a:xfrm>
-            <a:off x="548640" y="4434840"/>
-            <a:ext cx="3657600" cy="237744"/>
-          </a:xfrm>
-          <a:prstGeom prst="rect">
-            <a:avLst/>
-          </a:prstGeom>
-          <a:noFill/>
-          <a:ln/>
-        </p:spPr>
-        <p:txBody>
-          <a:bodyPr wrap="square" rtlCol="0" anchor="ctr"/>
-          <a:lstStyle/>
-          <a:p>
-            <a:pPr indent="0" marL="0">
-              <a:buNone/>
-            </a:pPr>
-            <a:r>
-              <a:rPr lang="en-US" sz="900" b="1" spc="300" kern="0" dirty="0">
-                <a:solidFill>
-                  <a:srgbClr val="998D67"/>
-                </a:solidFill>
-                <a:latin typeface="Inter" pitchFamily="34" charset="0"/>
-                <a:ea typeface="Inter" pitchFamily="34" charset="-122"/>
-                <a:cs typeface="Inter" pitchFamily="34" charset="-120"/>
-              </a:rPr>
-              <a:t>RECOMENDAÇÃO</a:t>
-            </a:r>
-            <a:endParaRPr lang="en-US" sz="900" dirty="0"/>
-          </a:p>
-        </p:txBody>
-      </p:sp>
-      <p:sp>
-        <p:nvSpPr>
-          <p:cNvPr id="15" name="Shape 13"/>
-          <p:cNvSpPr/>
-          <p:nvPr/>
-        </p:nvSpPr>
-        <p:spPr>
-          <a:xfrm>
-            <a:off x="548640" y="4709160"/>
-            <a:ext cx="2743200" cy="621792"/>
+          <p:cNvPr id="14" name="Shape 12"/>
+          <p:cNvSpPr/>
+          <p:nvPr/>
+        </p:nvSpPr>
+        <p:spPr>
+          <a:xfrm>
+            <a:off x="8095488" y="1856232"/>
+            <a:ext cx="3544824" cy="1371600"/>
           </a:xfrm>
           <a:prstGeom prst="roundRect">
             <a:avLst>
-              <a:gd name="adj" fmla="val 8824"/>
+              <a:gd name="adj" fmla="val 4000"/>
+            </a:avLst>
+          </a:prstGeom>
+          <a:solidFill>
+            <a:srgbClr val="FBF9F2"/>
+          </a:solidFill>
+          <a:ln w="9525">
+            <a:solidFill>
+              <a:srgbClr val="998D67"/>
+            </a:solidFill>
+            <a:prstDash val="solid"/>
+          </a:ln>
+        </p:spPr>
+      </p:sp>
+      <p:sp>
+        <p:nvSpPr>
+          <p:cNvPr id="15" name="Text 13"/>
+          <p:cNvSpPr/>
+          <p:nvPr/>
+        </p:nvSpPr>
+        <p:spPr>
+          <a:xfrm>
+            <a:off x="8241792" y="1965960"/>
+            <a:ext cx="3252216" cy="237744"/>
+          </a:xfrm>
+          <a:prstGeom prst="rect">
+            <a:avLst/>
+          </a:prstGeom>
+          <a:noFill/>
+          <a:ln/>
+        </p:spPr>
+        <p:txBody>
+          <a:bodyPr wrap="square" rtlCol="0" anchor="ctr"/>
+          <a:lstStyle/>
+          <a:p>
+            <a:pPr indent="0" marL="0">
+              <a:buNone/>
+            </a:pPr>
+            <a:r>
+              <a:rPr lang="en-US" sz="950" b="1" spc="100" kern="0" dirty="0">
+                <a:solidFill>
+                  <a:srgbClr val="998D67"/>
+                </a:solidFill>
+                <a:latin typeface="Inter" pitchFamily="34" charset="0"/>
+                <a:ea typeface="Inter" pitchFamily="34" charset="-122"/>
+                <a:cs typeface="Inter" pitchFamily="34" charset="-120"/>
+              </a:rPr>
+              <a:t>EIXO C · INTEGRAÇÃO</a:t>
+            </a:r>
+            <a:endParaRPr lang="en-US" sz="950" dirty="0"/>
+          </a:p>
+        </p:txBody>
+      </p:sp>
+      <p:sp>
+        <p:nvSpPr>
+          <p:cNvPr id="16" name="Text 14"/>
+          <p:cNvSpPr/>
+          <p:nvPr/>
+        </p:nvSpPr>
+        <p:spPr>
+          <a:xfrm>
+            <a:off x="8241792" y="2240280"/>
+            <a:ext cx="3252216" cy="914400"/>
+          </a:xfrm>
+          <a:prstGeom prst="rect">
+            <a:avLst/>
+          </a:prstGeom>
+          <a:noFill/>
+          <a:ln/>
+        </p:spPr>
+        <p:txBody>
+          <a:bodyPr wrap="square" rtlCol="0" anchor="t"/>
+          <a:lstStyle/>
+          <a:p>
+            <a:pPr marL="101600" indent="-101600">
+              <a:lnSpc>
+                <a:spcPts val="1300"/>
+              </a:lnSpc>
+              <a:buSzPct val="100000"/>
+              <a:buChar char="•"/>
+            </a:pPr>
+            <a:r>
+              <a:rPr lang="en-US" sz="900" dirty="0">
+                <a:solidFill>
+                  <a:srgbClr val="2E3947"/>
+                </a:solidFill>
+                <a:latin typeface="Inter" pitchFamily="34" charset="0"/>
+                <a:ea typeface="Inter" pitchFamily="34" charset="-122"/>
+                <a:cs typeface="Inter" pitchFamily="34" charset="-120"/>
+              </a:rPr>
+              <a:t>Interdependência</a:t>
+            </a:r>
+            <a:endParaRPr lang="en-US" sz="900" dirty="0"/>
+          </a:p>
+          <a:p>
+            <a:pPr marL="101600" indent="-101600">
+              <a:lnSpc>
+                <a:spcPts val="1300"/>
+              </a:lnSpc>
+              <a:buSzPct val="100000"/>
+              <a:buChar char="•"/>
+            </a:pPr>
+            <a:r>
+              <a:rPr lang="en-US" sz="900" dirty="0">
+                <a:solidFill>
+                  <a:srgbClr val="2E3947"/>
+                </a:solidFill>
+                <a:latin typeface="Inter" pitchFamily="34" charset="0"/>
+                <a:ea typeface="Inter" pitchFamily="34" charset="-122"/>
+                <a:cs typeface="Inter" pitchFamily="34" charset="-120"/>
+              </a:rPr>
+              <a:t>Governança e criticidade</a:t>
+            </a:r>
+            <a:endParaRPr lang="en-US" sz="900" dirty="0"/>
+          </a:p>
+        </p:txBody>
+      </p:sp>
+      <p:sp>
+        <p:nvSpPr>
+          <p:cNvPr id="17" name="Text 15"/>
+          <p:cNvSpPr/>
+          <p:nvPr/>
+        </p:nvSpPr>
+        <p:spPr>
+          <a:xfrm>
+            <a:off x="548640" y="3300984"/>
+            <a:ext cx="11091672" cy="237744"/>
+          </a:xfrm>
+          <a:prstGeom prst="rect">
+            <a:avLst/>
+          </a:prstGeom>
+          <a:noFill/>
+          <a:ln/>
+        </p:spPr>
+        <p:txBody>
+          <a:bodyPr wrap="square" rtlCol="0" anchor="ctr"/>
+          <a:lstStyle/>
+          <a:p>
+            <a:pPr indent="0" marL="0">
+              <a:buNone/>
+            </a:pPr>
+            <a:r>
+              <a:rPr lang="en-US" sz="900" i="1" dirty="0">
+                <a:solidFill>
+                  <a:srgbClr val="7A8494"/>
+                </a:solidFill>
+                <a:latin typeface="Inter" pitchFamily="34" charset="0"/>
+                <a:ea typeface="Inter" pitchFamily="34" charset="-122"/>
+                <a:cs typeface="Inter" pitchFamily="34" charset="-120"/>
+              </a:rPr>
+              <a:t>O eixo C (interdependência + criticidade) separa PM&amp;GO integrado de EPP + GMO apartados.</a:t>
+            </a:r>
+            <a:endParaRPr lang="en-US" sz="900" dirty="0"/>
+          </a:p>
+        </p:txBody>
+      </p:sp>
+      <p:sp>
+        <p:nvSpPr>
+          <p:cNvPr id="18" name="Text 16"/>
+          <p:cNvSpPr/>
+          <p:nvPr/>
+        </p:nvSpPr>
+        <p:spPr>
+          <a:xfrm>
+            <a:off x="548640" y="3657600"/>
+            <a:ext cx="3657600" cy="237744"/>
+          </a:xfrm>
+          <a:prstGeom prst="rect">
+            <a:avLst/>
+          </a:prstGeom>
+          <a:noFill/>
+          <a:ln/>
+        </p:spPr>
+        <p:txBody>
+          <a:bodyPr wrap="square" rtlCol="0" anchor="ctr"/>
+          <a:lstStyle/>
+          <a:p>
+            <a:pPr indent="0" marL="0">
+              <a:buNone/>
+            </a:pPr>
+            <a:r>
+              <a:rPr lang="en-US" sz="900" b="1" spc="300" kern="0" dirty="0">
+                <a:solidFill>
+                  <a:srgbClr val="998D67"/>
+                </a:solidFill>
+                <a:latin typeface="Inter" pitchFamily="34" charset="0"/>
+                <a:ea typeface="Inter" pitchFamily="34" charset="-122"/>
+                <a:cs typeface="Inter" pitchFamily="34" charset="-120"/>
+              </a:rPr>
+              <a:t>RECOMENDAÇÃO</a:t>
+            </a:r>
+            <a:endParaRPr lang="en-US" sz="900" dirty="0"/>
+          </a:p>
+        </p:txBody>
+      </p:sp>
+      <p:sp>
+        <p:nvSpPr>
+          <p:cNvPr id="19" name="Shape 17"/>
+          <p:cNvSpPr/>
+          <p:nvPr/>
+        </p:nvSpPr>
+        <p:spPr>
+          <a:xfrm>
+            <a:off x="548640" y="3931920"/>
+            <a:ext cx="2115922" cy="841248"/>
+          </a:xfrm>
+          <a:prstGeom prst="roundRect">
+            <a:avLst>
+              <a:gd name="adj" fmla="val 6522"/>
             </a:avLst>
           </a:prstGeom>
           <a:solidFill>
@@ -22901,30 +23070,30 @@
       </p:sp>
       <p:sp>
         <p:nvSpPr>
-          <p:cNvPr id="16" name="Text 14"/>
-          <p:cNvSpPr/>
-          <p:nvPr/>
-        </p:nvSpPr>
-        <p:spPr>
-          <a:xfrm>
-            <a:off x="676656" y="4773168"/>
-            <a:ext cx="2468880" cy="219456"/>
-          </a:xfrm>
-          <a:prstGeom prst="rect">
-            <a:avLst/>
-          </a:prstGeom>
-          <a:noFill/>
-          <a:ln/>
-        </p:spPr>
-        <p:txBody>
-          <a:bodyPr wrap="square" rtlCol="0" anchor="ctr"/>
-          <a:lstStyle/>
-          <a:p>
-            <a:pPr indent="0" marL="0">
-              <a:buNone/>
-            </a:pPr>
-            <a:r>
-              <a:rPr lang="en-US" sz="800" dirty="0">
+          <p:cNvPr id="20" name="Text 18"/>
+          <p:cNvSpPr/>
+          <p:nvPr/>
+        </p:nvSpPr>
+        <p:spPr>
+          <a:xfrm>
+            <a:off x="658368" y="4023360"/>
+            <a:ext cx="1896466" cy="329184"/>
+          </a:xfrm>
+          <a:prstGeom prst="rect">
+            <a:avLst/>
+          </a:prstGeom>
+          <a:noFill/>
+          <a:ln/>
+        </p:spPr>
+        <p:txBody>
+          <a:bodyPr wrap="square" rtlCol="0" anchor="t"/>
+          <a:lstStyle/>
+          <a:p>
+            <a:pPr indent="0" marL="0">
+              <a:buNone/>
+            </a:pPr>
+            <a:r>
+              <a:rPr lang="en-US" sz="750" dirty="0">
                 <a:solidFill>
                   <a:srgbClr val="7A8494"/>
                 </a:solidFill>
@@ -22932,38 +23101,38 @@
                 <a:ea typeface="Inter" pitchFamily="34" charset="-122"/>
                 <a:cs typeface="Inter" pitchFamily="34" charset="-120"/>
               </a:rPr>
-              <a:t>A alto · B baixo</a:t>
-            </a:r>
-            <a:endParaRPr lang="en-US" sz="800" dirty="0"/>
-          </a:p>
-        </p:txBody>
-      </p:sp>
-      <p:sp>
-        <p:nvSpPr>
-          <p:cNvPr id="17" name="Text 15"/>
-          <p:cNvSpPr/>
-          <p:nvPr/>
-        </p:nvSpPr>
-        <p:spPr>
-          <a:xfrm>
-            <a:off x="676656" y="4983480"/>
-            <a:ext cx="2468880" cy="292608"/>
-          </a:xfrm>
-          <a:prstGeom prst="rect">
-            <a:avLst/>
-          </a:prstGeom>
-          <a:noFill/>
-          <a:ln/>
-        </p:spPr>
-        <p:txBody>
-          <a:bodyPr wrap="square" rtlCol="0" anchor="ctr"/>
-          <a:lstStyle/>
-          <a:p>
-            <a:pPr indent="0" marL="0">
-              <a:buNone/>
-            </a:pPr>
-            <a:r>
-              <a:rPr lang="en-US" sz="1300" dirty="0">
+              <a:t>A alta · B baixa</a:t>
+            </a:r>
+            <a:endParaRPr lang="en-US" sz="750" dirty="0"/>
+          </a:p>
+        </p:txBody>
+      </p:sp>
+      <p:sp>
+        <p:nvSpPr>
+          <p:cNvPr id="21" name="Text 19"/>
+          <p:cNvSpPr/>
+          <p:nvPr/>
+        </p:nvSpPr>
+        <p:spPr>
+          <a:xfrm>
+            <a:off x="658368" y="4334256"/>
+            <a:ext cx="1896466" cy="384048"/>
+          </a:xfrm>
+          <a:prstGeom prst="rect">
+            <a:avLst/>
+          </a:prstGeom>
+          <a:noFill/>
+          <a:ln/>
+        </p:spPr>
+        <p:txBody>
+          <a:bodyPr wrap="square" rtlCol="0" anchor="t"/>
+          <a:lstStyle/>
+          <a:p>
+            <a:pPr indent="0" marL="0">
+              <a:buNone/>
+            </a:pPr>
+            <a:r>
+              <a:rPr lang="en-US" sz="1100" dirty="0">
                 <a:solidFill>
                   <a:srgbClr val="4A5C72"/>
                 </a:solidFill>
@@ -22971,131 +23140,26 @@
                 <a:ea typeface="Fraunces" pitchFamily="34" charset="-122"/>
                 <a:cs typeface="Fraunces" pitchFamily="34" charset="-120"/>
               </a:rPr>
-              <a:t>EPP</a:t>
-            </a:r>
-            <a:endParaRPr lang="en-US" sz="1300" dirty="0"/>
-          </a:p>
-        </p:txBody>
-      </p:sp>
-      <p:sp>
-        <p:nvSpPr>
-          <p:cNvPr id="18" name="Shape 16"/>
-          <p:cNvSpPr/>
-          <p:nvPr/>
-        </p:nvSpPr>
-        <p:spPr>
-          <a:xfrm>
-            <a:off x="3429000" y="4709160"/>
-            <a:ext cx="2743200" cy="621792"/>
+              <a:t>Só EPP</a:t>
+            </a:r>
+            <a:endParaRPr lang="en-US" sz="1100" dirty="0"/>
+          </a:p>
+        </p:txBody>
+      </p:sp>
+      <p:sp>
+        <p:nvSpPr>
+          <p:cNvPr id="22" name="Shape 20"/>
+          <p:cNvSpPr/>
+          <p:nvPr/>
+        </p:nvSpPr>
+        <p:spPr>
+          <a:xfrm>
+            <a:off x="2792578" y="3931920"/>
+            <a:ext cx="2115922" cy="841248"/>
           </a:xfrm>
           <a:prstGeom prst="roundRect">
             <a:avLst>
-              <a:gd name="adj" fmla="val 8824"/>
-            </a:avLst>
-          </a:prstGeom>
-          <a:solidFill>
-            <a:srgbClr val="4A5C72"/>
-          </a:solidFill>
-          <a:ln w="9525">
-            <a:solidFill>
-              <a:srgbClr val="D9DDE3"/>
-            </a:solidFill>
-            <a:prstDash val="solid"/>
-          </a:ln>
-        </p:spPr>
-      </p:sp>
-      <p:sp>
-        <p:nvSpPr>
-          <p:cNvPr id="19" name="Text 17"/>
-          <p:cNvSpPr/>
-          <p:nvPr/>
-        </p:nvSpPr>
-        <p:spPr>
-          <a:xfrm>
-            <a:off x="3557016" y="4773168"/>
-            <a:ext cx="2468880" cy="219456"/>
-          </a:xfrm>
-          <a:prstGeom prst="rect">
-            <a:avLst/>
-          </a:prstGeom>
-          <a:noFill/>
-          <a:ln/>
-        </p:spPr>
-        <p:txBody>
-          <a:bodyPr wrap="square" rtlCol="0" anchor="ctr"/>
-          <a:lstStyle/>
-          <a:p>
-            <a:pPr indent="0" marL="0">
-              <a:buNone/>
-            </a:pPr>
-            <a:r>
-              <a:rPr lang="en-US" sz="800" dirty="0">
-                <a:solidFill>
-                  <a:srgbClr val="B9C3D0"/>
-                </a:solidFill>
-                <a:latin typeface="Inter" pitchFamily="34" charset="0"/>
-                <a:ea typeface="Inter" pitchFamily="34" charset="-122"/>
-                <a:cs typeface="Inter" pitchFamily="34" charset="-120"/>
-              </a:rPr>
-              <a:t>A alto · B alto</a:t>
-            </a:r>
-            <a:endParaRPr lang="en-US" sz="800" dirty="0"/>
-          </a:p>
-        </p:txBody>
-      </p:sp>
-      <p:sp>
-        <p:nvSpPr>
-          <p:cNvPr id="20" name="Text 18"/>
-          <p:cNvSpPr/>
-          <p:nvPr/>
-        </p:nvSpPr>
-        <p:spPr>
-          <a:xfrm>
-            <a:off x="3557016" y="4983480"/>
-            <a:ext cx="2468880" cy="292608"/>
-          </a:xfrm>
-          <a:prstGeom prst="rect">
-            <a:avLst/>
-          </a:prstGeom>
-          <a:noFill/>
-          <a:ln/>
-        </p:spPr>
-        <p:txBody>
-          <a:bodyPr wrap="square" rtlCol="0" anchor="ctr"/>
-          <a:lstStyle/>
-          <a:p>
-            <a:pPr indent="0" marL="0">
-              <a:buNone/>
-            </a:pPr>
-            <a:r>
-              <a:rPr lang="en-US" sz="1300" dirty="0">
-                <a:solidFill>
-                  <a:srgbClr val="FFFDF6"/>
-                </a:solidFill>
-                <a:latin typeface="Fraunces" pitchFamily="34" charset="0"/>
-                <a:ea typeface="Fraunces" pitchFamily="34" charset="-122"/>
-                <a:cs typeface="Fraunces" pitchFamily="34" charset="-120"/>
-              </a:rPr>
-              <a:t>PM&amp;GO</a:t>
-            </a:r>
-            <a:endParaRPr lang="en-US" sz="1300" dirty="0"/>
-          </a:p>
-        </p:txBody>
-      </p:sp>
-      <p:sp>
-        <p:nvSpPr>
-          <p:cNvPr id="21" name="Shape 19"/>
-          <p:cNvSpPr/>
-          <p:nvPr/>
-        </p:nvSpPr>
-        <p:spPr>
-          <a:xfrm>
-            <a:off x="548640" y="5422392"/>
-            <a:ext cx="2743200" cy="621792"/>
-          </a:xfrm>
-          <a:prstGeom prst="roundRect">
-            <a:avLst>
-              <a:gd name="adj" fmla="val 8824"/>
+              <a:gd name="adj" fmla="val 6522"/>
             </a:avLst>
           </a:prstGeom>
           <a:solidFill>
@@ -23111,30 +23175,30 @@
       </p:sp>
       <p:sp>
         <p:nvSpPr>
-          <p:cNvPr id="22" name="Text 20"/>
-          <p:cNvSpPr/>
-          <p:nvPr/>
-        </p:nvSpPr>
-        <p:spPr>
-          <a:xfrm>
-            <a:off x="676656" y="5486400"/>
-            <a:ext cx="2468880" cy="219456"/>
-          </a:xfrm>
-          <a:prstGeom prst="rect">
-            <a:avLst/>
-          </a:prstGeom>
-          <a:noFill/>
-          <a:ln/>
-        </p:spPr>
-        <p:txBody>
-          <a:bodyPr wrap="square" rtlCol="0" anchor="ctr"/>
-          <a:lstStyle/>
-          <a:p>
-            <a:pPr indent="0" marL="0">
-              <a:buNone/>
-            </a:pPr>
-            <a:r>
-              <a:rPr lang="en-US" sz="800" dirty="0">
+          <p:cNvPr id="23" name="Text 21"/>
+          <p:cNvSpPr/>
+          <p:nvPr/>
+        </p:nvSpPr>
+        <p:spPr>
+          <a:xfrm>
+            <a:off x="2902306" y="4023360"/>
+            <a:ext cx="1896466" cy="329184"/>
+          </a:xfrm>
+          <a:prstGeom prst="rect">
+            <a:avLst/>
+          </a:prstGeom>
+          <a:noFill/>
+          <a:ln/>
+        </p:spPr>
+        <p:txBody>
+          <a:bodyPr wrap="square" rtlCol="0" anchor="t"/>
+          <a:lstStyle/>
+          <a:p>
+            <a:pPr indent="0" marL="0">
+              <a:buNone/>
+            </a:pPr>
+            <a:r>
+              <a:rPr lang="en-US" sz="750" dirty="0">
                 <a:solidFill>
                   <a:srgbClr val="7A8494"/>
                 </a:solidFill>
@@ -23142,38 +23206,38 @@
                 <a:ea typeface="Inter" pitchFamily="34" charset="-122"/>
                 <a:cs typeface="Inter" pitchFamily="34" charset="-120"/>
               </a:rPr>
-              <a:t>A baixo · B baixo</a:t>
-            </a:r>
-            <a:endParaRPr lang="en-US" sz="800" dirty="0"/>
-          </a:p>
-        </p:txBody>
-      </p:sp>
-      <p:sp>
-        <p:nvSpPr>
-          <p:cNvPr id="23" name="Text 21"/>
-          <p:cNvSpPr/>
-          <p:nvPr/>
-        </p:nvSpPr>
-        <p:spPr>
-          <a:xfrm>
-            <a:off x="676656" y="5696712"/>
-            <a:ext cx="2468880" cy="292608"/>
-          </a:xfrm>
-          <a:prstGeom prst="rect">
-            <a:avLst/>
-          </a:prstGeom>
-          <a:noFill/>
-          <a:ln/>
-        </p:spPr>
-        <p:txBody>
-          <a:bodyPr wrap="square" rtlCol="0" anchor="ctr"/>
-          <a:lstStyle/>
-          <a:p>
-            <a:pPr indent="0" marL="0">
-              <a:buNone/>
-            </a:pPr>
-            <a:r>
-              <a:rPr lang="en-US" sz="1300" dirty="0">
+              <a:t>A baixa · B alta</a:t>
+            </a:r>
+            <a:endParaRPr lang="en-US" sz="750" dirty="0"/>
+          </a:p>
+        </p:txBody>
+      </p:sp>
+      <p:sp>
+        <p:nvSpPr>
+          <p:cNvPr id="24" name="Text 22"/>
+          <p:cNvSpPr/>
+          <p:nvPr/>
+        </p:nvSpPr>
+        <p:spPr>
+          <a:xfrm>
+            <a:off x="2902306" y="4334256"/>
+            <a:ext cx="1896466" cy="384048"/>
+          </a:xfrm>
+          <a:prstGeom prst="rect">
+            <a:avLst/>
+          </a:prstGeom>
+          <a:noFill/>
+          <a:ln/>
+        </p:spPr>
+        <p:txBody>
+          <a:bodyPr wrap="square" rtlCol="0" anchor="t"/>
+          <a:lstStyle/>
+          <a:p>
+            <a:pPr indent="0" marL="0">
+              <a:buNone/>
+            </a:pPr>
+            <a:r>
+              <a:rPr lang="en-US" sz="1100" dirty="0">
                 <a:solidFill>
                   <a:srgbClr val="4A5C72"/>
                 </a:solidFill>
@@ -23181,26 +23245,26 @@
                 <a:ea typeface="Fraunces" pitchFamily="34" charset="-122"/>
                 <a:cs typeface="Fraunces" pitchFamily="34" charset="-120"/>
               </a:rPr>
-              <a:t>Suporte leve</a:t>
-            </a:r>
-            <a:endParaRPr lang="en-US" sz="1300" dirty="0"/>
-          </a:p>
-        </p:txBody>
-      </p:sp>
-      <p:sp>
-        <p:nvSpPr>
-          <p:cNvPr id="24" name="Shape 22"/>
-          <p:cNvSpPr/>
-          <p:nvPr/>
-        </p:nvSpPr>
-        <p:spPr>
-          <a:xfrm>
-            <a:off x="3429000" y="5422392"/>
-            <a:ext cx="2743200" cy="621792"/>
+              <a:t>Só GMO</a:t>
+            </a:r>
+            <a:endParaRPr lang="en-US" sz="1100" dirty="0"/>
+          </a:p>
+        </p:txBody>
+      </p:sp>
+      <p:sp>
+        <p:nvSpPr>
+          <p:cNvPr id="25" name="Shape 23"/>
+          <p:cNvSpPr/>
+          <p:nvPr/>
+        </p:nvSpPr>
+        <p:spPr>
+          <a:xfrm>
+            <a:off x="5036515" y="3931920"/>
+            <a:ext cx="2115922" cy="841248"/>
           </a:xfrm>
           <a:prstGeom prst="roundRect">
             <a:avLst>
-              <a:gd name="adj" fmla="val 8824"/>
+              <a:gd name="adj" fmla="val 6522"/>
             </a:avLst>
           </a:prstGeom>
           <a:solidFill>
@@ -23216,30 +23280,30 @@
       </p:sp>
       <p:sp>
         <p:nvSpPr>
-          <p:cNvPr id="25" name="Text 23"/>
-          <p:cNvSpPr/>
-          <p:nvPr/>
-        </p:nvSpPr>
-        <p:spPr>
-          <a:xfrm>
-            <a:off x="3557016" y="5486400"/>
-            <a:ext cx="2468880" cy="219456"/>
-          </a:xfrm>
-          <a:prstGeom prst="rect">
-            <a:avLst/>
-          </a:prstGeom>
-          <a:noFill/>
-          <a:ln/>
-        </p:spPr>
-        <p:txBody>
-          <a:bodyPr wrap="square" rtlCol="0" anchor="ctr"/>
-          <a:lstStyle/>
-          <a:p>
-            <a:pPr indent="0" marL="0">
-              <a:buNone/>
-            </a:pPr>
-            <a:r>
-              <a:rPr lang="en-US" sz="800" dirty="0">
+          <p:cNvPr id="26" name="Text 24"/>
+          <p:cNvSpPr/>
+          <p:nvPr/>
+        </p:nvSpPr>
+        <p:spPr>
+          <a:xfrm>
+            <a:off x="5146243" y="4023360"/>
+            <a:ext cx="1896466" cy="329184"/>
+          </a:xfrm>
+          <a:prstGeom prst="rect">
+            <a:avLst/>
+          </a:prstGeom>
+          <a:noFill/>
+          <a:ln/>
+        </p:spPr>
+        <p:txBody>
+          <a:bodyPr wrap="square" rtlCol="0" anchor="t"/>
+          <a:lstStyle/>
+          <a:p>
+            <a:pPr indent="0" marL="0">
+              <a:buNone/>
+            </a:pPr>
+            <a:r>
+              <a:rPr lang="en-US" sz="750" dirty="0">
                 <a:solidFill>
                   <a:srgbClr val="7A8494"/>
                 </a:solidFill>
@@ -23247,38 +23311,38 @@
                 <a:ea typeface="Inter" pitchFamily="34" charset="-122"/>
                 <a:cs typeface="Inter" pitchFamily="34" charset="-120"/>
               </a:rPr>
-              <a:t>A baixo · B alto</a:t>
-            </a:r>
-            <a:endParaRPr lang="en-US" sz="800" dirty="0"/>
-          </a:p>
-        </p:txBody>
-      </p:sp>
-      <p:sp>
-        <p:nvSpPr>
-          <p:cNvPr id="26" name="Text 24"/>
-          <p:cNvSpPr/>
-          <p:nvPr/>
-        </p:nvSpPr>
-        <p:spPr>
-          <a:xfrm>
-            <a:off x="3557016" y="5696712"/>
-            <a:ext cx="2468880" cy="292608"/>
-          </a:xfrm>
-          <a:prstGeom prst="rect">
-            <a:avLst/>
-          </a:prstGeom>
-          <a:noFill/>
-          <a:ln/>
-        </p:spPr>
-        <p:txBody>
-          <a:bodyPr wrap="square" rtlCol="0" anchor="ctr"/>
-          <a:lstStyle/>
-          <a:p>
-            <a:pPr indent="0" marL="0">
-              <a:buNone/>
-            </a:pPr>
-            <a:r>
-              <a:rPr lang="en-US" sz="1300" dirty="0">
+              <a:t>A+B altas · C baixa</a:t>
+            </a:r>
+            <a:endParaRPr lang="en-US" sz="750" dirty="0"/>
+          </a:p>
+        </p:txBody>
+      </p:sp>
+      <p:sp>
+        <p:nvSpPr>
+          <p:cNvPr id="27" name="Text 25"/>
+          <p:cNvSpPr/>
+          <p:nvPr/>
+        </p:nvSpPr>
+        <p:spPr>
+          <a:xfrm>
+            <a:off x="5146243" y="4334256"/>
+            <a:ext cx="1896466" cy="384048"/>
+          </a:xfrm>
+          <a:prstGeom prst="rect">
+            <a:avLst/>
+          </a:prstGeom>
+          <a:noFill/>
+          <a:ln/>
+        </p:spPr>
+        <p:txBody>
+          <a:bodyPr wrap="square" rtlCol="0" anchor="t"/>
+          <a:lstStyle/>
+          <a:p>
+            <a:pPr indent="0" marL="0">
+              <a:buNone/>
+            </a:pPr>
+            <a:r>
+              <a:rPr lang="en-US" sz="1100" dirty="0">
                 <a:solidFill>
                   <a:srgbClr val="4A5C72"/>
                 </a:solidFill>
@@ -23286,48 +23350,9 @@
                 <a:ea typeface="Fraunces" pitchFamily="34" charset="-122"/>
                 <a:cs typeface="Fraunces" pitchFamily="34" charset="-120"/>
               </a:rPr>
-              <a:t>GMO</a:t>
-            </a:r>
-            <a:endParaRPr lang="en-US" sz="1300" dirty="0"/>
-          </a:p>
-        </p:txBody>
-      </p:sp>
-      <p:sp>
-        <p:nvSpPr>
-          <p:cNvPr id="27" name="Text 25"/>
-          <p:cNvSpPr/>
-          <p:nvPr/>
-        </p:nvSpPr>
-        <p:spPr>
-          <a:xfrm>
-            <a:off x="6766560" y="4434840"/>
-            <a:ext cx="4572000" cy="237744"/>
-          </a:xfrm>
-          <a:prstGeom prst="rect">
-            <a:avLst/>
-          </a:prstGeom>
-          <a:noFill/>
-          <a:ln/>
-        </p:spPr>
-        <p:txBody>
-          <a:bodyPr wrap="square" rtlCol="0" anchor="ctr"/>
-          <a:lstStyle/>
-          <a:p>
-            <a:pPr indent="0" marL="0">
-              <a:buNone/>
-            </a:pPr>
-            <a:r>
-              <a:rPr lang="en-US" sz="900" b="1" spc="300" kern="0" dirty="0">
-                <a:solidFill>
-                  <a:srgbClr val="998D67"/>
-                </a:solidFill>
-                <a:latin typeface="Inter" pitchFamily="34" charset="0"/>
-                <a:ea typeface="Inter" pitchFamily="34" charset="-122"/>
-                <a:cs typeface="Inter" pitchFamily="34" charset="-120"/>
-              </a:rPr>
-              <a:t>MODO DE ATUAÇÃO (INTENSIDADE)</a:t>
-            </a:r>
-            <a:endParaRPr lang="en-US" sz="900" dirty="0"/>
+              <a:t>EPP + GMO apartados</a:t>
+            </a:r>
+            <a:endParaRPr lang="en-US" sz="1100" dirty="0"/>
           </a:p>
         </p:txBody>
       </p:sp>
@@ -23339,18 +23364,23 @@
         </p:nvSpPr>
         <p:spPr>
           <a:xfrm>
-            <a:off x="6766560" y="4709160"/>
-            <a:ext cx="1371600" cy="384048"/>
+            <a:off x="7280453" y="3931920"/>
+            <a:ext cx="2115922" cy="841248"/>
           </a:xfrm>
           <a:prstGeom prst="roundRect">
             <a:avLst>
-              <a:gd name="adj" fmla="val 14286"/>
+              <a:gd name="adj" fmla="val 6522"/>
             </a:avLst>
           </a:prstGeom>
           <a:solidFill>
             <a:srgbClr val="4A5C72"/>
           </a:solidFill>
-          <a:ln/>
+          <a:ln w="9525">
+            <a:solidFill>
+              <a:srgbClr val="4A5C72"/>
+            </a:solidFill>
+            <a:prstDash val="solid"/>
+          </a:ln>
         </p:spPr>
       </p:sp>
       <p:sp>
@@ -23361,73 +23391,73 @@
         </p:nvSpPr>
         <p:spPr>
           <a:xfrm>
-            <a:off x="6766560" y="4709160"/>
-            <a:ext cx="1371600" cy="384048"/>
-          </a:xfrm>
-          <a:prstGeom prst="rect">
-            <a:avLst/>
-          </a:prstGeom>
-          <a:noFill/>
-          <a:ln/>
-        </p:spPr>
-        <p:txBody>
-          <a:bodyPr wrap="square" rtlCol="0" anchor="ctr"/>
-          <a:lstStyle/>
-          <a:p>
-            <a:pPr algn="ctr" indent="0" marL="0">
-              <a:buNone/>
-            </a:pPr>
-            <a:r>
-              <a:rPr lang="en-US" sz="950" b="1" dirty="0">
+            <a:off x="7390181" y="4023360"/>
+            <a:ext cx="1896466" cy="329184"/>
+          </a:xfrm>
+          <a:prstGeom prst="rect">
+            <a:avLst/>
+          </a:prstGeom>
+          <a:noFill/>
+          <a:ln/>
+        </p:spPr>
+        <p:txBody>
+          <a:bodyPr wrap="square" rtlCol="0" anchor="t"/>
+          <a:lstStyle/>
+          <a:p>
+            <a:pPr indent="0" marL="0">
+              <a:buNone/>
+            </a:pPr>
+            <a:r>
+              <a:rPr lang="en-US" sz="750" dirty="0">
+                <a:solidFill>
+                  <a:srgbClr val="B9C3D0"/>
+                </a:solidFill>
+                <a:latin typeface="Inter" pitchFamily="34" charset="0"/>
+                <a:ea typeface="Inter" pitchFamily="34" charset="-122"/>
+                <a:cs typeface="Inter" pitchFamily="34" charset="-120"/>
+              </a:rPr>
+              <a:t>A+B+C altas</a:t>
+            </a:r>
+            <a:endParaRPr lang="en-US" sz="750" dirty="0"/>
+          </a:p>
+        </p:txBody>
+      </p:sp>
+      <p:sp>
+        <p:nvSpPr>
+          <p:cNvPr id="30" name="Text 28"/>
+          <p:cNvSpPr/>
+          <p:nvPr/>
+        </p:nvSpPr>
+        <p:spPr>
+          <a:xfrm>
+            <a:off x="7390181" y="4334256"/>
+            <a:ext cx="1896466" cy="384048"/>
+          </a:xfrm>
+          <a:prstGeom prst="rect">
+            <a:avLst/>
+          </a:prstGeom>
+          <a:noFill/>
+          <a:ln/>
+        </p:spPr>
+        <p:txBody>
+          <a:bodyPr wrap="square" rtlCol="0" anchor="t"/>
+          <a:lstStyle/>
+          <a:p>
+            <a:pPr indent="0" marL="0">
+              <a:buNone/>
+            </a:pPr>
+            <a:r>
+              <a:rPr lang="en-US" sz="1100" dirty="0">
                 <a:solidFill>
                   <a:srgbClr val="FFFDF6"/>
                 </a:solidFill>
-                <a:latin typeface="Inter" pitchFamily="34" charset="0"/>
-                <a:ea typeface="Inter" pitchFamily="34" charset="-122"/>
-                <a:cs typeface="Inter" pitchFamily="34" charset="-120"/>
-              </a:rPr>
-              <a:t>Suporte</a:t>
-            </a:r>
-            <a:endParaRPr lang="en-US" sz="950" dirty="0"/>
-          </a:p>
-        </p:txBody>
-      </p:sp>
-      <p:sp>
-        <p:nvSpPr>
-          <p:cNvPr id="30" name="Text 28"/>
-          <p:cNvSpPr/>
-          <p:nvPr/>
-        </p:nvSpPr>
-        <p:spPr>
-          <a:xfrm>
-            <a:off x="8275320" y="4709160"/>
-            <a:ext cx="3364992" cy="384048"/>
-          </a:xfrm>
-          <a:prstGeom prst="rect">
-            <a:avLst/>
-          </a:prstGeom>
-          <a:noFill/>
-          <a:ln/>
-        </p:spPr>
-        <p:txBody>
-          <a:bodyPr wrap="square" rtlCol="0" anchor="ctr"/>
-          <a:lstStyle/>
-          <a:p>
-            <a:pPr indent="0" marL="0">
-              <a:buNone/>
-            </a:pPr>
-            <a:r>
-              <a:rPr lang="en-US" sz="800" dirty="0">
-                <a:solidFill>
-                  <a:srgbClr val="7A8494"/>
-                </a:solidFill>
-                <a:latin typeface="Inter" pitchFamily="34" charset="0"/>
-                <a:ea typeface="Inter" pitchFamily="34" charset="-122"/>
-                <a:cs typeface="Inter" pitchFamily="34" charset="-120"/>
-              </a:rPr>
-              <a:t>Maturidade razoável e criticidade baixa a média.</a:t>
-            </a:r>
-            <a:endParaRPr lang="en-US" sz="800" dirty="0"/>
+                <a:latin typeface="Fraunces" pitchFamily="34" charset="0"/>
+                <a:ea typeface="Fraunces" pitchFamily="34" charset="-122"/>
+                <a:cs typeface="Fraunces" pitchFamily="34" charset="-120"/>
+              </a:rPr>
+              <a:t>PM&amp;GO integrado</a:t>
+            </a:r>
+            <a:endParaRPr lang="en-US" sz="1100" dirty="0"/>
           </a:p>
         </p:txBody>
       </p:sp>
@@ -23439,12 +23469,156 @@
         </p:nvSpPr>
         <p:spPr>
           <a:xfrm>
-            <a:off x="6766560" y="5184648"/>
-            <a:ext cx="1371600" cy="384048"/>
+            <a:off x="9524390" y="3931920"/>
+            <a:ext cx="2115922" cy="841248"/>
           </a:xfrm>
           <a:prstGeom prst="roundRect">
             <a:avLst>
-              <a:gd name="adj" fmla="val 14286"/>
+              <a:gd name="adj" fmla="val 6522"/>
+            </a:avLst>
+          </a:prstGeom>
+          <a:solidFill>
+            <a:srgbClr val="FFFFFF"/>
+          </a:solidFill>
+          <a:ln w="9525">
+            <a:solidFill>
+              <a:srgbClr val="D9DDE3"/>
+            </a:solidFill>
+            <a:prstDash val="solid"/>
+          </a:ln>
+        </p:spPr>
+      </p:sp>
+      <p:sp>
+        <p:nvSpPr>
+          <p:cNvPr id="32" name="Text 30"/>
+          <p:cNvSpPr/>
+          <p:nvPr/>
+        </p:nvSpPr>
+        <p:spPr>
+          <a:xfrm>
+            <a:off x="9634118" y="4023360"/>
+            <a:ext cx="1896466" cy="329184"/>
+          </a:xfrm>
+          <a:prstGeom prst="rect">
+            <a:avLst/>
+          </a:prstGeom>
+          <a:noFill/>
+          <a:ln/>
+        </p:spPr>
+        <p:txBody>
+          <a:bodyPr wrap="square" rtlCol="0" anchor="t"/>
+          <a:lstStyle/>
+          <a:p>
+            <a:pPr indent="0" marL="0">
+              <a:buNone/>
+            </a:pPr>
+            <a:r>
+              <a:rPr lang="en-US" sz="750" dirty="0">
+                <a:solidFill>
+                  <a:srgbClr val="7A8494"/>
+                </a:solidFill>
+                <a:latin typeface="Inter" pitchFamily="34" charset="0"/>
+                <a:ea typeface="Inter" pitchFamily="34" charset="-122"/>
+                <a:cs typeface="Inter" pitchFamily="34" charset="-120"/>
+              </a:rPr>
+              <a:t>Todas baixas</a:t>
+            </a:r>
+            <a:endParaRPr lang="en-US" sz="750" dirty="0"/>
+          </a:p>
+        </p:txBody>
+      </p:sp>
+      <p:sp>
+        <p:nvSpPr>
+          <p:cNvPr id="33" name="Text 31"/>
+          <p:cNvSpPr/>
+          <p:nvPr/>
+        </p:nvSpPr>
+        <p:spPr>
+          <a:xfrm>
+            <a:off x="9634118" y="4334256"/>
+            <a:ext cx="1896466" cy="384048"/>
+          </a:xfrm>
+          <a:prstGeom prst="rect">
+            <a:avLst/>
+          </a:prstGeom>
+          <a:noFill/>
+          <a:ln/>
+        </p:spPr>
+        <p:txBody>
+          <a:bodyPr wrap="square" rtlCol="0" anchor="t"/>
+          <a:lstStyle/>
+          <a:p>
+            <a:pPr indent="0" marL="0">
+              <a:buNone/>
+            </a:pPr>
+            <a:r>
+              <a:rPr lang="en-US" sz="1100" dirty="0">
+                <a:solidFill>
+                  <a:srgbClr val="4A5C72"/>
+                </a:solidFill>
+                <a:latin typeface="Fraunces" pitchFamily="34" charset="0"/>
+                <a:ea typeface="Fraunces" pitchFamily="34" charset="-122"/>
+                <a:cs typeface="Fraunces" pitchFamily="34" charset="-120"/>
+              </a:rPr>
+              <a:t>Suporte leve</a:t>
+            </a:r>
+            <a:endParaRPr lang="en-US" sz="1100" dirty="0"/>
+          </a:p>
+        </p:txBody>
+      </p:sp>
+      <p:sp>
+        <p:nvSpPr>
+          <p:cNvPr id="34" name="Text 32"/>
+          <p:cNvSpPr/>
+          <p:nvPr/>
+        </p:nvSpPr>
+        <p:spPr>
+          <a:xfrm>
+            <a:off x="548640" y="4937760"/>
+            <a:ext cx="7315200" cy="237744"/>
+          </a:xfrm>
+          <a:prstGeom prst="rect">
+            <a:avLst/>
+          </a:prstGeom>
+          <a:noFill/>
+          <a:ln/>
+        </p:spPr>
+        <p:txBody>
+          <a:bodyPr wrap="square" rtlCol="0" anchor="ctr"/>
+          <a:lstStyle/>
+          <a:p>
+            <a:pPr indent="0" marL="0">
+              <a:buNone/>
+            </a:pPr>
+            <a:r>
+              <a:rPr lang="en-US" sz="900" b="1" spc="200" kern="0" dirty="0">
+                <a:solidFill>
+                  <a:srgbClr val="998D67"/>
+                </a:solidFill>
+                <a:latin typeface="Inter" pitchFamily="34" charset="0"/>
+                <a:ea typeface="Inter" pitchFamily="34" charset="-122"/>
+                <a:cs typeface="Inter" pitchFamily="34" charset="-120"/>
+              </a:rPr>
+              <a:t>MODO DE ATUAÇÃO (INTENSIDADE) — ortogonal à oferta</a:t>
+            </a:r>
+            <a:endParaRPr lang="en-US" sz="900" dirty="0"/>
+          </a:p>
+        </p:txBody>
+      </p:sp>
+      <p:sp>
+        <p:nvSpPr>
+          <p:cNvPr id="35" name="Shape 33"/>
+          <p:cNvSpPr/>
+          <p:nvPr/>
+        </p:nvSpPr>
+        <p:spPr>
+          <a:xfrm>
+            <a:off x="548640" y="5212080"/>
+            <a:ext cx="1371600" cy="292608"/>
+          </a:xfrm>
+          <a:prstGeom prst="roundRect">
+            <a:avLst>
+              <a:gd name="adj" fmla="val 18750"/>
             </a:avLst>
           </a:prstGeom>
           <a:solidFill>
@@ -23455,14 +23629,14 @@
       </p:sp>
       <p:sp>
         <p:nvSpPr>
-          <p:cNvPr id="32" name="Text 30"/>
-          <p:cNvSpPr/>
-          <p:nvPr/>
-        </p:nvSpPr>
-        <p:spPr>
-          <a:xfrm>
-            <a:off x="6766560" y="5184648"/>
-            <a:ext cx="1371600" cy="384048"/>
+          <p:cNvPr id="36" name="Text 34"/>
+          <p:cNvSpPr/>
+          <p:nvPr/>
+        </p:nvSpPr>
+        <p:spPr>
+          <a:xfrm>
+            <a:off x="548640" y="5212080"/>
+            <a:ext cx="1371600" cy="292608"/>
           </a:xfrm>
           <a:prstGeom prst="rect">
             <a:avLst/>
@@ -23486,7 +23660,7 @@
                 <a:ea typeface="Inter" pitchFamily="34" charset="-122"/>
                 <a:cs typeface="Inter" pitchFamily="34" charset="-120"/>
               </a:rPr>
-              <a:t>Controle</a:t>
+              <a:t>Suporte</a:t>
             </a:r>
             <a:endParaRPr lang="en-US" sz="950" dirty="0"/>
           </a:p>
@@ -23494,30 +23668,30 @@
       </p:sp>
       <p:sp>
         <p:nvSpPr>
-          <p:cNvPr id="33" name="Text 31"/>
-          <p:cNvSpPr/>
-          <p:nvPr/>
-        </p:nvSpPr>
-        <p:spPr>
-          <a:xfrm>
-            <a:off x="8275320" y="5184648"/>
-            <a:ext cx="3364992" cy="384048"/>
-          </a:xfrm>
-          <a:prstGeom prst="rect">
-            <a:avLst/>
-          </a:prstGeom>
-          <a:noFill/>
-          <a:ln/>
-        </p:spPr>
-        <p:txBody>
-          <a:bodyPr wrap="square" rtlCol="0" anchor="ctr"/>
-          <a:lstStyle/>
-          <a:p>
-            <a:pPr indent="0" marL="0">
-              <a:buNone/>
-            </a:pPr>
-            <a:r>
-              <a:rPr lang="en-US" sz="800" dirty="0">
+          <p:cNvPr id="37" name="Text 35"/>
+          <p:cNvSpPr/>
+          <p:nvPr/>
+        </p:nvSpPr>
+        <p:spPr>
+          <a:xfrm>
+            <a:off x="2057400" y="5212080"/>
+            <a:ext cx="9582912" cy="292608"/>
+          </a:xfrm>
+          <a:prstGeom prst="rect">
+            <a:avLst/>
+          </a:prstGeom>
+          <a:noFill/>
+          <a:ln/>
+        </p:spPr>
+        <p:txBody>
+          <a:bodyPr wrap="square" rtlCol="0" anchor="ctr"/>
+          <a:lstStyle/>
+          <a:p>
+            <a:pPr indent="0" marL="0">
+              <a:buNone/>
+            </a:pPr>
+            <a:r>
+              <a:rPr lang="en-US" sz="850" dirty="0">
                 <a:solidFill>
                   <a:srgbClr val="7A8494"/>
                 </a:solidFill>
@@ -23525,26 +23699,26 @@
                 <a:ea typeface="Inter" pitchFamily="34" charset="-122"/>
                 <a:cs typeface="Inter" pitchFamily="34" charset="-120"/>
               </a:rPr>
-              <a:t>Maturidade em construção ou criticidade relevante.</a:t>
-            </a:r>
-            <a:endParaRPr lang="en-US" sz="800" dirty="0"/>
-          </a:p>
-        </p:txBody>
-      </p:sp>
-      <p:sp>
-        <p:nvSpPr>
-          <p:cNvPr id="34" name="Shape 32"/>
-          <p:cNvSpPr/>
-          <p:nvPr/>
-        </p:nvSpPr>
-        <p:spPr>
-          <a:xfrm>
-            <a:off x="6766560" y="5660136"/>
-            <a:ext cx="1371600" cy="384048"/>
+              <a:t>Maturidade razoável e criticidade baixa a média.</a:t>
+            </a:r>
+            <a:endParaRPr lang="en-US" sz="850" dirty="0"/>
+          </a:p>
+        </p:txBody>
+      </p:sp>
+      <p:sp>
+        <p:nvSpPr>
+          <p:cNvPr id="38" name="Shape 36"/>
+          <p:cNvSpPr/>
+          <p:nvPr/>
+        </p:nvSpPr>
+        <p:spPr>
+          <a:xfrm>
+            <a:off x="548640" y="5577840"/>
+            <a:ext cx="1371600" cy="292608"/>
           </a:xfrm>
           <a:prstGeom prst="roundRect">
             <a:avLst>
-              <a:gd name="adj" fmla="val 14286"/>
+              <a:gd name="adj" fmla="val 18750"/>
             </a:avLst>
           </a:prstGeom>
           <a:solidFill>
@@ -23555,14 +23729,14 @@
       </p:sp>
       <p:sp>
         <p:nvSpPr>
-          <p:cNvPr id="35" name="Text 33"/>
-          <p:cNvSpPr/>
-          <p:nvPr/>
-        </p:nvSpPr>
-        <p:spPr>
-          <a:xfrm>
-            <a:off x="6766560" y="5660136"/>
-            <a:ext cx="1371600" cy="384048"/>
+          <p:cNvPr id="39" name="Text 37"/>
+          <p:cNvSpPr/>
+          <p:nvPr/>
+        </p:nvSpPr>
+        <p:spPr>
+          <a:xfrm>
+            <a:off x="548640" y="5577840"/>
+            <a:ext cx="1371600" cy="292608"/>
           </a:xfrm>
           <a:prstGeom prst="rect">
             <a:avLst/>
@@ -23586,6 +23760,106 @@
                 <a:ea typeface="Inter" pitchFamily="34" charset="-122"/>
                 <a:cs typeface="Inter" pitchFamily="34" charset="-120"/>
               </a:rPr>
+              <a:t>Controle</a:t>
+            </a:r>
+            <a:endParaRPr lang="en-US" sz="950" dirty="0"/>
+          </a:p>
+        </p:txBody>
+      </p:sp>
+      <p:sp>
+        <p:nvSpPr>
+          <p:cNvPr id="40" name="Text 38"/>
+          <p:cNvSpPr/>
+          <p:nvPr/>
+        </p:nvSpPr>
+        <p:spPr>
+          <a:xfrm>
+            <a:off x="2057400" y="5577840"/>
+            <a:ext cx="9582912" cy="292608"/>
+          </a:xfrm>
+          <a:prstGeom prst="rect">
+            <a:avLst/>
+          </a:prstGeom>
+          <a:noFill/>
+          <a:ln/>
+        </p:spPr>
+        <p:txBody>
+          <a:bodyPr wrap="square" rtlCol="0" anchor="ctr"/>
+          <a:lstStyle/>
+          <a:p>
+            <a:pPr indent="0" marL="0">
+              <a:buNone/>
+            </a:pPr>
+            <a:r>
+              <a:rPr lang="en-US" sz="850" dirty="0">
+                <a:solidFill>
+                  <a:srgbClr val="7A8494"/>
+                </a:solidFill>
+                <a:latin typeface="Inter" pitchFamily="34" charset="0"/>
+                <a:ea typeface="Inter" pitchFamily="34" charset="-122"/>
+                <a:cs typeface="Inter" pitchFamily="34" charset="-120"/>
+              </a:rPr>
+              <a:t>Maturidade em construção ou criticidade relevante.</a:t>
+            </a:r>
+            <a:endParaRPr lang="en-US" sz="850" dirty="0"/>
+          </a:p>
+        </p:txBody>
+      </p:sp>
+      <p:sp>
+        <p:nvSpPr>
+          <p:cNvPr id="41" name="Shape 39"/>
+          <p:cNvSpPr/>
+          <p:nvPr/>
+        </p:nvSpPr>
+        <p:spPr>
+          <a:xfrm>
+            <a:off x="548640" y="5943600"/>
+            <a:ext cx="1371600" cy="292608"/>
+          </a:xfrm>
+          <a:prstGeom prst="roundRect">
+            <a:avLst>
+              <a:gd name="adj" fmla="val 18750"/>
+            </a:avLst>
+          </a:prstGeom>
+          <a:solidFill>
+            <a:srgbClr val="4A5C72"/>
+          </a:solidFill>
+          <a:ln/>
+        </p:spPr>
+      </p:sp>
+      <p:sp>
+        <p:nvSpPr>
+          <p:cNvPr id="42" name="Text 40"/>
+          <p:cNvSpPr/>
+          <p:nvPr/>
+        </p:nvSpPr>
+        <p:spPr>
+          <a:xfrm>
+            <a:off x="548640" y="5943600"/>
+            <a:ext cx="1371600" cy="292608"/>
+          </a:xfrm>
+          <a:prstGeom prst="rect">
+            <a:avLst/>
+          </a:prstGeom>
+          <a:noFill/>
+          <a:ln/>
+        </p:spPr>
+        <p:txBody>
+          <a:bodyPr wrap="square" rtlCol="0" anchor="ctr"/>
+          <a:lstStyle/>
+          <a:p>
+            <a:pPr algn="ctr" indent="0" marL="0">
+              <a:buNone/>
+            </a:pPr>
+            <a:r>
+              <a:rPr lang="en-US" sz="950" b="1" dirty="0">
+                <a:solidFill>
+                  <a:srgbClr val="FFFDF6"/>
+                </a:solidFill>
+                <a:latin typeface="Inter" pitchFamily="34" charset="0"/>
+                <a:ea typeface="Inter" pitchFamily="34" charset="-122"/>
+                <a:cs typeface="Inter" pitchFamily="34" charset="-120"/>
+              </a:rPr>
               <a:t>Diretivo</a:t>
             </a:r>
             <a:endParaRPr lang="en-US" sz="950" dirty="0"/>
@@ -23594,30 +23868,30 @@
       </p:sp>
       <p:sp>
         <p:nvSpPr>
-          <p:cNvPr id="36" name="Text 34"/>
-          <p:cNvSpPr/>
-          <p:nvPr/>
-        </p:nvSpPr>
-        <p:spPr>
-          <a:xfrm>
-            <a:off x="8275320" y="5660136"/>
-            <a:ext cx="3364992" cy="384048"/>
-          </a:xfrm>
-          <a:prstGeom prst="rect">
-            <a:avLst/>
-          </a:prstGeom>
-          <a:noFill/>
-          <a:ln/>
-        </p:spPr>
-        <p:txBody>
-          <a:bodyPr wrap="square" rtlCol="0" anchor="ctr"/>
-          <a:lstStyle/>
-          <a:p>
-            <a:pPr indent="0" marL="0">
-              <a:buNone/>
-            </a:pPr>
-            <a:r>
-              <a:rPr lang="en-US" sz="800" dirty="0">
+          <p:cNvPr id="43" name="Text 41"/>
+          <p:cNvSpPr/>
+          <p:nvPr/>
+        </p:nvSpPr>
+        <p:spPr>
+          <a:xfrm>
+            <a:off x="2057400" y="5943600"/>
+            <a:ext cx="9582912" cy="292608"/>
+          </a:xfrm>
+          <a:prstGeom prst="rect">
+            <a:avLst/>
+          </a:prstGeom>
+          <a:noFill/>
+          <a:ln/>
+        </p:spPr>
+        <p:txBody>
+          <a:bodyPr wrap="square" rtlCol="0" anchor="ctr"/>
+          <a:lstStyle/>
+          <a:p>
+            <a:pPr indent="0" marL="0">
+              <a:buNone/>
+            </a:pPr>
+            <a:r>
+              <a:rPr lang="en-US" sz="850" dirty="0">
                 <a:solidFill>
                   <a:srgbClr val="7A8494"/>
                 </a:solidFill>
@@ -23627,7 +23901,7 @@
               </a:rPr>
               <a:t>Baixa maturidade e alta criticidade — momentos decisivos.</a:t>
             </a:r>
-            <a:endParaRPr lang="en-US" sz="800" dirty="0"/>
+            <a:endParaRPr lang="en-US" sz="850" dirty="0"/>
           </a:p>
         </p:txBody>
       </p:sp>
@@ -23842,7 +24116,7 @@
         <p:spPr>
           <a:xfrm>
             <a:off x="548640" y="6473952"/>
-            <a:ext cx="7315200" cy="274320"/>
+            <a:ext cx="8686800" cy="274320"/>
           </a:xfrm>
           <a:prstGeom prst="rect">
             <a:avLst/>
@@ -23866,7 +24140,7 @@
                 <a:ea typeface="Inter" pitchFamily="34" charset="-122"/>
                 <a:cs typeface="Inter" pitchFamily="34" charset="-120"/>
               </a:rPr>
-              <a:t>Metodologia Governança, Projetos e Mudança  ·  material interno</a:t>
+              <a:t>Metodologia Governança, Projetos e Mudança  ·  material interno e exclusivo Obliant</a:t>
             </a:r>
             <a:endParaRPr lang="en-US" sz="800" dirty="0"/>
           </a:p>
@@ -27415,7 +27689,7 @@
         <p:spPr>
           <a:xfrm>
             <a:off x="548640" y="6473952"/>
-            <a:ext cx="7315200" cy="274320"/>
+            <a:ext cx="8686800" cy="274320"/>
           </a:xfrm>
           <a:prstGeom prst="rect">
             <a:avLst/>
@@ -27439,7 +27713,7 @@
                 <a:ea typeface="Inter" pitchFamily="34" charset="-122"/>
                 <a:cs typeface="Inter" pitchFamily="34" charset="-120"/>
               </a:rPr>
-              <a:t>Metodologia Governança, Projetos e Mudança  ·  material interno</a:t>
+              <a:t>Metodologia Governança, Projetos e Mudança  ·  material interno e exclusivo Obliant</a:t>
             </a:r>
             <a:endParaRPr lang="en-US" sz="800" dirty="0"/>
           </a:p>
@@ -29236,7 +29510,7 @@
         <p:spPr>
           <a:xfrm>
             <a:off x="548640" y="6473952"/>
-            <a:ext cx="7315200" cy="274320"/>
+            <a:ext cx="8686800" cy="274320"/>
           </a:xfrm>
           <a:prstGeom prst="rect">
             <a:avLst/>
@@ -29260,7 +29534,7 @@
                 <a:ea typeface="Inter" pitchFamily="34" charset="-122"/>
                 <a:cs typeface="Inter" pitchFamily="34" charset="-120"/>
               </a:rPr>
-              <a:t>Metodologia Governança, Projetos e Mudança  ·  material interno</a:t>
+              <a:t>Metodologia Governança, Projetos e Mudança  ·  material interno e exclusivo Obliant</a:t>
             </a:r>
             <a:endParaRPr lang="en-US" sz="800" dirty="0"/>
           </a:p>
@@ -31067,7 +31341,7 @@
         <p:spPr>
           <a:xfrm>
             <a:off x="548640" y="6473952"/>
-            <a:ext cx="7315200" cy="274320"/>
+            <a:ext cx="8686800" cy="274320"/>
           </a:xfrm>
           <a:prstGeom prst="rect">
             <a:avLst/>
@@ -31091,7 +31365,7 @@
                 <a:ea typeface="Inter" pitchFamily="34" charset="-122"/>
                 <a:cs typeface="Inter" pitchFamily="34" charset="-120"/>
               </a:rPr>
-              <a:t>Metodologia Governança, Projetos e Mudança  ·  material interno</a:t>
+              <a:t>Metodologia Governança, Projetos e Mudança  ·  material interno e exclusivo Obliant</a:t>
             </a:r>
             <a:endParaRPr lang="en-US" sz="800" dirty="0"/>
           </a:p>
@@ -33035,7 +33309,7 @@
         <p:spPr>
           <a:xfrm>
             <a:off x="548640" y="6473952"/>
-            <a:ext cx="7315200" cy="274320"/>
+            <a:ext cx="8686800" cy="274320"/>
           </a:xfrm>
           <a:prstGeom prst="rect">
             <a:avLst/>
@@ -33059,7 +33333,7 @@
                 <a:ea typeface="Inter" pitchFamily="34" charset="-122"/>
                 <a:cs typeface="Inter" pitchFamily="34" charset="-120"/>
               </a:rPr>
-              <a:t>Metodologia Governança, Projetos e Mudança  ·  material interno</a:t>
+              <a:t>Metodologia Governança, Projetos e Mudança  ·  material interno e exclusivo Obliant</a:t>
             </a:r>
             <a:endParaRPr lang="en-US" sz="800" dirty="0"/>
           </a:p>
@@ -35490,7 +35764,7 @@
         <p:spPr>
           <a:xfrm>
             <a:off x="548640" y="6473952"/>
-            <a:ext cx="7315200" cy="274320"/>
+            <a:ext cx="8686800" cy="274320"/>
           </a:xfrm>
           <a:prstGeom prst="rect">
             <a:avLst/>
@@ -35514,7 +35788,7 @@
                 <a:ea typeface="Inter" pitchFamily="34" charset="-122"/>
                 <a:cs typeface="Inter" pitchFamily="34" charset="-120"/>
               </a:rPr>
-              <a:t>Metodologia Governança, Projetos e Mudança  ·  material interno</a:t>
+              <a:t>Metodologia Governança, Projetos e Mudança  ·  material interno e exclusivo Obliant</a:t>
             </a:r>
             <a:endParaRPr lang="en-US" sz="800" dirty="0"/>
           </a:p>
@@ -36785,7 +37059,7 @@
         <p:spPr>
           <a:xfrm>
             <a:off x="548640" y="6473952"/>
-            <a:ext cx="7315200" cy="274320"/>
+            <a:ext cx="8686800" cy="274320"/>
           </a:xfrm>
           <a:prstGeom prst="rect">
             <a:avLst/>
@@ -36809,7 +37083,7 @@
                 <a:ea typeface="Inter" pitchFamily="34" charset="-122"/>
                 <a:cs typeface="Inter" pitchFamily="34" charset="-120"/>
               </a:rPr>
-              <a:t>Metodologia Governança, Projetos e Mudança  ·  material interno</a:t>
+              <a:t>Metodologia Governança, Projetos e Mudança  ·  material interno e exclusivo Obliant</a:t>
             </a:r>
             <a:endParaRPr lang="en-US" sz="800" dirty="0"/>
           </a:p>
@@ -38148,7 +38422,7 @@
         <p:spPr>
           <a:xfrm>
             <a:off x="548640" y="6473952"/>
-            <a:ext cx="7315200" cy="274320"/>
+            <a:ext cx="8686800" cy="274320"/>
           </a:xfrm>
           <a:prstGeom prst="rect">
             <a:avLst/>
@@ -38172,7 +38446,7 @@
                 <a:ea typeface="Inter" pitchFamily="34" charset="-122"/>
                 <a:cs typeface="Inter" pitchFamily="34" charset="-120"/>
               </a:rPr>
-              <a:t>Metodologia Governança, Projetos e Mudança  ·  material interno</a:t>
+              <a:t>Metodologia Governança, Projetos e Mudança  ·  material interno e exclusivo Obliant</a:t>
             </a:r>
             <a:endParaRPr lang="en-US" sz="800" dirty="0"/>
           </a:p>

--- a/Metodologia_Obliant.pptx
+++ b/Metodologia_Obliant.pptx
@@ -23575,7 +23575,7 @@
         <p:spPr>
           <a:xfrm>
             <a:off x="548640" y="4937760"/>
-            <a:ext cx="7315200" cy="237744"/>
+            <a:ext cx="8229600" cy="237744"/>
           </a:xfrm>
           <a:prstGeom prst="rect">
             <a:avLst/>
@@ -23599,7 +23599,7 @@
                 <a:ea typeface="Inter" pitchFamily="34" charset="-122"/>
                 <a:cs typeface="Inter" pitchFamily="34" charset="-120"/>
               </a:rPr>
-              <a:t>MODO DE ATUAÇÃO (INTENSIDADE) — ortogonal à oferta</a:t>
+              <a:t>MODO DE ATUAÇÃO (INTENSIDADE) — exclusivo do PM&amp;GO integrado</a:t>
             </a:r>
             <a:endParaRPr lang="en-US" sz="900" dirty="0"/>
           </a:p>

--- a/Metodologia_Obliant.pptx
+++ b/Metodologia_Obliant.pptx
@@ -22408,7 +22408,7 @@
                 <a:ea typeface="Fraunces" pitchFamily="34" charset="-122"/>
                 <a:cs typeface="Fraunces" pitchFamily="34" charset="-120"/>
               </a:rPr>
-              <a:t>Assessment de fit — três eixos, oferta e modo certos</a:t>
+              <a:t>Assessment de fit — há fit para o PM&amp;GO?</a:t>
             </a:r>
             <a:endParaRPr lang="en-US" sz="2600" dirty="0"/>
           </a:p>
@@ -22447,7 +22447,7 @@
                 <a:ea typeface="Inter" pitchFamily="34" charset="-122"/>
                 <a:cs typeface="Inter" pitchFamily="34" charset="-120"/>
               </a:rPr>
-              <a:t>Para o PM&amp;GO o assessment mede adequação (fit), não maturidade: 8 perguntas em três eixos — A (necessidade de entrega), B (necessidade de adoção) e C (interdependência e criticidade). O resultado recomenda a oferta certa — só EPP, só GMO, EPP + GMO apartados, PM&amp;GO integrado ou suporte leve — e o modo de atuação.</a:t>
+              <a:t>Este assessment é um portão de fit para o PM&amp;GO: 8 perguntas em três eixos — A (necessidade de entrega), B (necessidade de adoção) e C (interdependência e criticidade). Se houver fit, recomenda o PM&amp;GO e o modo de atuação (Suporte, Controle ou Diretivo). Se não houver, aponta uma frente a avaliar — EPP ou GMO — ou suporte leve.</a:t>
             </a:r>
             <a:endParaRPr lang="en-US" sz="1100" dirty="0"/>
           </a:p>
@@ -22996,7 +22996,7 @@
                 <a:ea typeface="Inter" pitchFamily="34" charset="-122"/>
                 <a:cs typeface="Inter" pitchFamily="34" charset="-120"/>
               </a:rPr>
-              <a:t>O eixo C (interdependência + criticidade) separa PM&amp;GO integrado de EPP + GMO apartados.</a:t>
+              <a:t>Há fit para o PM&amp;GO só quando A, B e C são altos. Sem fit, avalia-se UMA frente — EPP ou GMO — nunca as duas juntas.</a:t>
             </a:r>
             <a:endParaRPr lang="en-US" sz="900" dirty="0"/>
           </a:p>
@@ -23011,7 +23011,7 @@
         <p:spPr>
           <a:xfrm>
             <a:off x="548640" y="3657600"/>
-            <a:ext cx="3657600" cy="237744"/>
+            <a:ext cx="4572000" cy="237744"/>
           </a:xfrm>
           <a:prstGeom prst="rect">
             <a:avLst/>
@@ -23035,7 +23035,7 @@
                 <a:ea typeface="Inter" pitchFamily="34" charset="-122"/>
                 <a:cs typeface="Inter" pitchFamily="34" charset="-120"/>
               </a:rPr>
-              <a:t>RECOMENDAÇÃO</a:t>
+              <a:t>SAÍDAS DO PORTÃO DE FIT</a:t>
             </a:r>
             <a:endParaRPr lang="en-US" sz="900" dirty="0"/>
           </a:p>
@@ -23050,6 +23050,111 @@
         <p:spPr>
           <a:xfrm>
             <a:off x="548640" y="3931920"/>
+            <a:ext cx="2115922" cy="841248"/>
+          </a:xfrm>
+          <a:prstGeom prst="roundRect">
+            <a:avLst>
+              <a:gd name="adj" fmla="val 6522"/>
+            </a:avLst>
+          </a:prstGeom>
+          <a:solidFill>
+            <a:srgbClr val="4A5C72"/>
+          </a:solidFill>
+          <a:ln w="9525">
+            <a:solidFill>
+              <a:srgbClr val="4A5C72"/>
+            </a:solidFill>
+            <a:prstDash val="solid"/>
+          </a:ln>
+        </p:spPr>
+      </p:sp>
+      <p:sp>
+        <p:nvSpPr>
+          <p:cNvPr id="20" name="Text 18"/>
+          <p:cNvSpPr/>
+          <p:nvPr/>
+        </p:nvSpPr>
+        <p:spPr>
+          <a:xfrm>
+            <a:off x="658368" y="4023360"/>
+            <a:ext cx="1896466" cy="329184"/>
+          </a:xfrm>
+          <a:prstGeom prst="rect">
+            <a:avLst/>
+          </a:prstGeom>
+          <a:noFill/>
+          <a:ln/>
+        </p:spPr>
+        <p:txBody>
+          <a:bodyPr wrap="square" rtlCol="0" anchor="t"/>
+          <a:lstStyle/>
+          <a:p>
+            <a:pPr indent="0" marL="0">
+              <a:buNone/>
+            </a:pPr>
+            <a:r>
+              <a:rPr lang="en-US" sz="750" dirty="0">
+                <a:solidFill>
+                  <a:srgbClr val="B9C3D0"/>
+                </a:solidFill>
+                <a:latin typeface="Inter" pitchFamily="34" charset="0"/>
+                <a:ea typeface="Inter" pitchFamily="34" charset="-122"/>
+                <a:cs typeface="Inter" pitchFamily="34" charset="-120"/>
+              </a:rPr>
+              <a:t>A+B+C altas</a:t>
+            </a:r>
+            <a:endParaRPr lang="en-US" sz="750" dirty="0"/>
+          </a:p>
+        </p:txBody>
+      </p:sp>
+      <p:sp>
+        <p:nvSpPr>
+          <p:cNvPr id="21" name="Text 19"/>
+          <p:cNvSpPr/>
+          <p:nvPr/>
+        </p:nvSpPr>
+        <p:spPr>
+          <a:xfrm>
+            <a:off x="658368" y="4334256"/>
+            <a:ext cx="1896466" cy="384048"/>
+          </a:xfrm>
+          <a:prstGeom prst="rect">
+            <a:avLst/>
+          </a:prstGeom>
+          <a:noFill/>
+          <a:ln/>
+        </p:spPr>
+        <p:txBody>
+          <a:bodyPr wrap="square" rtlCol="0" anchor="t"/>
+          <a:lstStyle/>
+          <a:p>
+            <a:pPr indent="0" marL="0">
+              <a:buNone/>
+            </a:pPr>
+            <a:r>
+              <a:rPr lang="en-US" sz="1100" dirty="0">
+                <a:solidFill>
+                  <a:srgbClr val="FFFDF6"/>
+                </a:solidFill>
+                <a:latin typeface="Fraunces" pitchFamily="34" charset="0"/>
+                <a:ea typeface="Fraunces" pitchFamily="34" charset="-122"/>
+                <a:cs typeface="Fraunces" pitchFamily="34" charset="-120"/>
+              </a:rPr>
+              <a:t>PM&amp;GO + modo</a:t>
+            </a:r>
+            <a:endParaRPr lang="en-US" sz="1100" dirty="0"/>
+          </a:p>
+        </p:txBody>
+      </p:sp>
+      <p:sp>
+        <p:nvSpPr>
+          <p:cNvPr id="22" name="Shape 20"/>
+          <p:cNvSpPr/>
+          <p:nvPr/>
+        </p:nvSpPr>
+        <p:spPr>
+          <a:xfrm>
+            <a:off x="2792578" y="3931920"/>
             <a:ext cx="2115922" cy="841248"/>
           </a:xfrm>
           <a:prstGeom prst="roundRect">
@@ -23070,13 +23175,13 @@
       </p:sp>
       <p:sp>
         <p:nvSpPr>
-          <p:cNvPr id="20" name="Text 18"/>
-          <p:cNvSpPr/>
-          <p:nvPr/>
-        </p:nvSpPr>
-        <p:spPr>
-          <a:xfrm>
-            <a:off x="658368" y="4023360"/>
+          <p:cNvPr id="23" name="Text 21"/>
+          <p:cNvSpPr/>
+          <p:nvPr/>
+        </p:nvSpPr>
+        <p:spPr>
+          <a:xfrm>
+            <a:off x="2902306" y="4023360"/>
             <a:ext cx="1896466" cy="329184"/>
           </a:xfrm>
           <a:prstGeom prst="rect">
@@ -23101,7 +23206,7 @@
                 <a:ea typeface="Inter" pitchFamily="34" charset="-122"/>
                 <a:cs typeface="Inter" pitchFamily="34" charset="-120"/>
               </a:rPr>
-              <a:t>A alta · B baixa</a:t>
+              <a:t>A+B altas · C baixa</a:t>
             </a:r>
             <a:endParaRPr lang="en-US" sz="750" dirty="0"/>
           </a:p>
@@ -23109,13 +23214,13 @@
       </p:sp>
       <p:sp>
         <p:nvSpPr>
-          <p:cNvPr id="21" name="Text 19"/>
-          <p:cNvSpPr/>
-          <p:nvPr/>
-        </p:nvSpPr>
-        <p:spPr>
-          <a:xfrm>
-            <a:off x="658368" y="4334256"/>
+          <p:cNvPr id="24" name="Text 22"/>
+          <p:cNvSpPr/>
+          <p:nvPr/>
+        </p:nvSpPr>
+        <p:spPr>
+          <a:xfrm>
+            <a:off x="2902306" y="4334256"/>
             <a:ext cx="1896466" cy="384048"/>
           </a:xfrm>
           <a:prstGeom prst="rect">
@@ -23140,7 +23245,7 @@
                 <a:ea typeface="Fraunces" pitchFamily="34" charset="-122"/>
                 <a:cs typeface="Fraunces" pitchFamily="34" charset="-120"/>
               </a:rPr>
-              <a:t>Só EPP</a:t>
+              <a:t>Sem fit → EPP ou GMO</a:t>
             </a:r>
             <a:endParaRPr lang="en-US" sz="1100" dirty="0"/>
           </a:p>
@@ -23148,13 +23253,13 @@
       </p:sp>
       <p:sp>
         <p:nvSpPr>
-          <p:cNvPr id="22" name="Shape 20"/>
-          <p:cNvSpPr/>
-          <p:nvPr/>
-        </p:nvSpPr>
-        <p:spPr>
-          <a:xfrm>
-            <a:off x="2792578" y="3931920"/>
+          <p:cNvPr id="25" name="Shape 23"/>
+          <p:cNvSpPr/>
+          <p:nvPr/>
+        </p:nvSpPr>
+        <p:spPr>
+          <a:xfrm>
+            <a:off x="5036515" y="3931920"/>
             <a:ext cx="2115922" cy="841248"/>
           </a:xfrm>
           <a:prstGeom prst="roundRect">
@@ -23175,13 +23280,13 @@
       </p:sp>
       <p:sp>
         <p:nvSpPr>
-          <p:cNvPr id="23" name="Text 21"/>
-          <p:cNvSpPr/>
-          <p:nvPr/>
-        </p:nvSpPr>
-        <p:spPr>
-          <a:xfrm>
-            <a:off x="2902306" y="4023360"/>
+          <p:cNvPr id="26" name="Text 24"/>
+          <p:cNvSpPr/>
+          <p:nvPr/>
+        </p:nvSpPr>
+        <p:spPr>
+          <a:xfrm>
+            <a:off x="5146243" y="4023360"/>
             <a:ext cx="1896466" cy="329184"/>
           </a:xfrm>
           <a:prstGeom prst="rect">
@@ -23206,7 +23311,7 @@
                 <a:ea typeface="Inter" pitchFamily="34" charset="-122"/>
                 <a:cs typeface="Inter" pitchFamily="34" charset="-120"/>
               </a:rPr>
-              <a:t>A baixa · B alta</a:t>
+              <a:t>A alta · B baixa</a:t>
             </a:r>
             <a:endParaRPr lang="en-US" sz="750" dirty="0"/>
           </a:p>
@@ -23214,13 +23319,13 @@
       </p:sp>
       <p:sp>
         <p:nvSpPr>
-          <p:cNvPr id="24" name="Text 22"/>
-          <p:cNvSpPr/>
-          <p:nvPr/>
-        </p:nvSpPr>
-        <p:spPr>
-          <a:xfrm>
-            <a:off x="2902306" y="4334256"/>
+          <p:cNvPr id="27" name="Text 25"/>
+          <p:cNvSpPr/>
+          <p:nvPr/>
+        </p:nvSpPr>
+        <p:spPr>
+          <a:xfrm>
+            <a:off x="5146243" y="4334256"/>
             <a:ext cx="1896466" cy="384048"/>
           </a:xfrm>
           <a:prstGeom prst="rect">
@@ -23245,7 +23350,7 @@
                 <a:ea typeface="Fraunces" pitchFamily="34" charset="-122"/>
                 <a:cs typeface="Fraunces" pitchFamily="34" charset="-120"/>
               </a:rPr>
-              <a:t>Só GMO</a:t>
+              <a:t>Sem fit → EPP</a:t>
             </a:r>
             <a:endParaRPr lang="en-US" sz="1100" dirty="0"/>
           </a:p>
@@ -23253,13 +23358,13 @@
       </p:sp>
       <p:sp>
         <p:nvSpPr>
-          <p:cNvPr id="25" name="Shape 23"/>
-          <p:cNvSpPr/>
-          <p:nvPr/>
-        </p:nvSpPr>
-        <p:spPr>
-          <a:xfrm>
-            <a:off x="5036515" y="3931920"/>
+          <p:cNvPr id="28" name="Shape 26"/>
+          <p:cNvSpPr/>
+          <p:nvPr/>
+        </p:nvSpPr>
+        <p:spPr>
+          <a:xfrm>
+            <a:off x="7280453" y="3931920"/>
             <a:ext cx="2115922" cy="841248"/>
           </a:xfrm>
           <a:prstGeom prst="roundRect">
@@ -23280,13 +23385,13 @@
       </p:sp>
       <p:sp>
         <p:nvSpPr>
-          <p:cNvPr id="26" name="Text 24"/>
-          <p:cNvSpPr/>
-          <p:nvPr/>
-        </p:nvSpPr>
-        <p:spPr>
-          <a:xfrm>
-            <a:off x="5146243" y="4023360"/>
+          <p:cNvPr id="29" name="Text 27"/>
+          <p:cNvSpPr/>
+          <p:nvPr/>
+        </p:nvSpPr>
+        <p:spPr>
+          <a:xfrm>
+            <a:off x="7390181" y="4023360"/>
             <a:ext cx="1896466" cy="329184"/>
           </a:xfrm>
           <a:prstGeom prst="rect">
@@ -23311,7 +23416,7 @@
                 <a:ea typeface="Inter" pitchFamily="34" charset="-122"/>
                 <a:cs typeface="Inter" pitchFamily="34" charset="-120"/>
               </a:rPr>
-              <a:t>A+B altas · C baixa</a:t>
+              <a:t>A baixa · B alta</a:t>
             </a:r>
             <a:endParaRPr lang="en-US" sz="750" dirty="0"/>
           </a:p>
@@ -23319,13 +23424,13 @@
       </p:sp>
       <p:sp>
         <p:nvSpPr>
-          <p:cNvPr id="27" name="Text 25"/>
-          <p:cNvSpPr/>
-          <p:nvPr/>
-        </p:nvSpPr>
-        <p:spPr>
-          <a:xfrm>
-            <a:off x="5146243" y="4334256"/>
+          <p:cNvPr id="30" name="Text 28"/>
+          <p:cNvSpPr/>
+          <p:nvPr/>
+        </p:nvSpPr>
+        <p:spPr>
+          <a:xfrm>
+            <a:off x="7390181" y="4334256"/>
             <a:ext cx="1896466" cy="384048"/>
           </a:xfrm>
           <a:prstGeom prst="rect">
@@ -23350,112 +23455,7 @@
                 <a:ea typeface="Fraunces" pitchFamily="34" charset="-122"/>
                 <a:cs typeface="Fraunces" pitchFamily="34" charset="-120"/>
               </a:rPr>
-              <a:t>EPP + GMO apartados</a:t>
-            </a:r>
-            <a:endParaRPr lang="en-US" sz="1100" dirty="0"/>
-          </a:p>
-        </p:txBody>
-      </p:sp>
-      <p:sp>
-        <p:nvSpPr>
-          <p:cNvPr id="28" name="Shape 26"/>
-          <p:cNvSpPr/>
-          <p:nvPr/>
-        </p:nvSpPr>
-        <p:spPr>
-          <a:xfrm>
-            <a:off x="7280453" y="3931920"/>
-            <a:ext cx="2115922" cy="841248"/>
-          </a:xfrm>
-          <a:prstGeom prst="roundRect">
-            <a:avLst>
-              <a:gd name="adj" fmla="val 6522"/>
-            </a:avLst>
-          </a:prstGeom>
-          <a:solidFill>
-            <a:srgbClr val="4A5C72"/>
-          </a:solidFill>
-          <a:ln w="9525">
-            <a:solidFill>
-              <a:srgbClr val="4A5C72"/>
-            </a:solidFill>
-            <a:prstDash val="solid"/>
-          </a:ln>
-        </p:spPr>
-      </p:sp>
-      <p:sp>
-        <p:nvSpPr>
-          <p:cNvPr id="29" name="Text 27"/>
-          <p:cNvSpPr/>
-          <p:nvPr/>
-        </p:nvSpPr>
-        <p:spPr>
-          <a:xfrm>
-            <a:off x="7390181" y="4023360"/>
-            <a:ext cx="1896466" cy="329184"/>
-          </a:xfrm>
-          <a:prstGeom prst="rect">
-            <a:avLst/>
-          </a:prstGeom>
-          <a:noFill/>
-          <a:ln/>
-        </p:spPr>
-        <p:txBody>
-          <a:bodyPr wrap="square" rtlCol="0" anchor="t"/>
-          <a:lstStyle/>
-          <a:p>
-            <a:pPr indent="0" marL="0">
-              <a:buNone/>
-            </a:pPr>
-            <a:r>
-              <a:rPr lang="en-US" sz="750" dirty="0">
-                <a:solidFill>
-                  <a:srgbClr val="B9C3D0"/>
-                </a:solidFill>
-                <a:latin typeface="Inter" pitchFamily="34" charset="0"/>
-                <a:ea typeface="Inter" pitchFamily="34" charset="-122"/>
-                <a:cs typeface="Inter" pitchFamily="34" charset="-120"/>
-              </a:rPr>
-              <a:t>A+B+C altas</a:t>
-            </a:r>
-            <a:endParaRPr lang="en-US" sz="750" dirty="0"/>
-          </a:p>
-        </p:txBody>
-      </p:sp>
-      <p:sp>
-        <p:nvSpPr>
-          <p:cNvPr id="30" name="Text 28"/>
-          <p:cNvSpPr/>
-          <p:nvPr/>
-        </p:nvSpPr>
-        <p:spPr>
-          <a:xfrm>
-            <a:off x="7390181" y="4334256"/>
-            <a:ext cx="1896466" cy="384048"/>
-          </a:xfrm>
-          <a:prstGeom prst="rect">
-            <a:avLst/>
-          </a:prstGeom>
-          <a:noFill/>
-          <a:ln/>
-        </p:spPr>
-        <p:txBody>
-          <a:bodyPr wrap="square" rtlCol="0" anchor="t"/>
-          <a:lstStyle/>
-          <a:p>
-            <a:pPr indent="0" marL="0">
-              <a:buNone/>
-            </a:pPr>
-            <a:r>
-              <a:rPr lang="en-US" sz="1100" dirty="0">
-                <a:solidFill>
-                  <a:srgbClr val="FFFDF6"/>
-                </a:solidFill>
-                <a:latin typeface="Fraunces" pitchFamily="34" charset="0"/>
-                <a:ea typeface="Fraunces" pitchFamily="34" charset="-122"/>
-                <a:cs typeface="Fraunces" pitchFamily="34" charset="-120"/>
-              </a:rPr>
-              <a:t>PM&amp;GO integrado</a:t>
+              <a:t>Sem fit → GMO</a:t>
             </a:r>
             <a:endParaRPr lang="en-US" sz="1100" dirty="0"/>
           </a:p>

--- a/Metodologia_Obliant.pptx
+++ b/Metodologia_Obliant.pptx
@@ -4053,7 +4053,7 @@
                 <a:ea typeface="Inter" pitchFamily="34" charset="-122"/>
                 <a:cs typeface="Inter" pitchFamily="34" charset="-120"/>
               </a:rPr>
-              <a:t>Base conceitual: ADKAR, Kotter, ACMP, SAP/Oracle OCM.</a:t>
+              <a:t>Método proprietário Obliant. ADKAR, Kotter, ACMP e SAP/Oracle OCM são base conceitual — não a metodologia.</a:t>
             </a:r>
             <a:endParaRPr lang="en-US" sz="800" dirty="0"/>
           </a:p>
